--- a/assets/figures-editable/c3-c4/c4-e11.pptx
+++ b/assets/figures-editable/c3-c4/c4-e11.pptx
@@ -3104,8 +3104,8 @@
         </p:nvSpPr>
         <p:spPr>
           <a:xfrm>
-            <a:off x="274320" y="137160"/>
-            <a:ext cx="11612880" cy="365760"/>
+            <a:off x="274320" y="118872"/>
+            <a:ext cx="11612880" cy="340105"/>
           </a:xfrm>
           <a:prstGeom prst="rect">
             <a:avLst/>
@@ -3114,7 +3114,7 @@
           <a:effectLst/>
         </p:spPr>
         <p:txBody>
-          <a:bodyPr wrap="square" lIns="27432" rIns="27432" tIns="18288" bIns="18288" anchor="ctr">
+          <a:bodyPr wrap="none" lIns="18288" rIns="18288" tIns="18288" bIns="18288" anchor="t">
             <a:spAutoFit/>
           </a:bodyPr>
           <a:lstStyle/>
@@ -3125,7 +3125,7 @@
               </a:spcAft>
             </a:pPr>
             <a:r>
-              <a:rPr sz="2100" b="0" i="0">
+              <a:rPr sz="1900" b="1" i="0">
                 <a:solidFill>
                   <a:srgbClr val="8EDBD4"/>
                 </a:solidFill>
@@ -3136,270 +3136,455 @@
           </a:p>
         </p:txBody>
       </p:sp>
-      <p:cxnSp>
-        <p:nvCxnSpPr>
-          <p:cNvPr id="3" name="C4-E11 line 1" descr="sci-ppt:o001"/>
-          <p:cNvCxnSpPr/>
+      <p:sp>
+        <p:nvSpPr>
+          <p:cNvPr id="3" name="C4-E11 round_rect 1" descr="sci-ppt:o001"/>
+          <p:cNvSpPr/>
           <p:nvPr/>
-        </p:nvCxnSpPr>
-        <p:spPr>
-          <a:xfrm>
-            <a:off x="914400" y="2468880"/>
-            <a:ext cx="8229600" cy="0"/>
-          </a:xfrm>
-          <a:prstGeom prst="line">
+        </p:nvSpPr>
+        <p:spPr>
+          <a:xfrm>
+            <a:off x="365760" y="914400"/>
+            <a:ext cx="5760720" cy="4846320"/>
+          </a:xfrm>
+          <a:prstGeom prst="roundRect">
             <a:avLst/>
           </a:prstGeom>
-          <a:ln w="25400">
+          <a:solidFill>
+            <a:srgbClr val="213E4B"/>
+          </a:solidFill>
+          <a:ln w="20320">
+            <a:solidFill>
+              <a:srgbClr val="8EDBD4"/>
+            </a:solidFill>
+          </a:ln>
+          <a:effectLst/>
+        </p:spPr>
+        <p:txBody>
+          <a:bodyPr rtlCol="0" anchor="ctr"/>
+          <a:lstStyle/>
+          <a:p>
+            <a:pPr algn="ctr"/>
+          </a:p>
+        </p:txBody>
+      </p:sp>
+      <p:sp>
+        <p:nvSpPr>
+          <p:cNvPr id="4" name="C4-E11 text 2" descr="sci-ppt:o002"/>
+          <p:cNvSpPr txBox="1"/>
+          <p:nvPr/>
+        </p:nvSpPr>
+        <p:spPr>
+          <a:xfrm>
+            <a:off x="475488" y="969264"/>
+            <a:ext cx="5541264" cy="254889"/>
+          </a:xfrm>
+          <a:prstGeom prst="rect">
+            <a:avLst/>
+          </a:prstGeom>
+          <a:noFill/>
+          <a:effectLst/>
+        </p:spPr>
+        <p:txBody>
+          <a:bodyPr wrap="none" lIns="18288" rIns="18288" tIns="18288" bIns="18288" anchor="t">
+            <a:spAutoFit/>
+          </a:bodyPr>
+          <a:lstStyle/>
+          <a:p>
+            <a:pPr algn="l">
+              <a:spcAft>
+                <a:spcPts val="0"/>
+              </a:spcAft>
+            </a:pPr>
+            <a:r>
+              <a:rPr sz="1350" b="1" i="0">
+                <a:solidFill>
+                  <a:srgbClr val="8EDBD4"/>
+                </a:solidFill>
+                <a:latin typeface="Arial"/>
+              </a:rPr>
+              <a:t>Energy released per area of crack</a:t>
+            </a:r>
+          </a:p>
+        </p:txBody>
+      </p:sp>
+      <p:sp>
+        <p:nvSpPr>
+          <p:cNvPr id="5" name="C4-E11 rect 3" descr="sci-ppt:o003"/>
+          <p:cNvSpPr/>
+          <p:nvPr/>
+        </p:nvSpPr>
+        <p:spPr>
+          <a:xfrm>
+            <a:off x="731520" y="1828800"/>
+            <a:ext cx="5029200" cy="320040"/>
+          </a:xfrm>
+          <a:prstGeom prst="rect">
+            <a:avLst/>
+          </a:prstGeom>
+          <a:solidFill>
+            <a:srgbClr val="3A5362"/>
+          </a:solidFill>
+          <a:ln w="17780">
             <a:solidFill>
               <a:srgbClr val="B4C7D2"/>
             </a:solidFill>
           </a:ln>
           <a:effectLst/>
         </p:spPr>
-      </p:cxnSp>
+        <p:txBody>
+          <a:bodyPr rtlCol="0" anchor="ctr"/>
+          <a:lstStyle/>
+          <a:p>
+            <a:pPr algn="ctr"/>
+          </a:p>
+        </p:txBody>
+      </p:sp>
+      <p:sp>
+        <p:nvSpPr>
+          <p:cNvPr id="6" name="C4-E11 rect 4" descr="sci-ppt:o004"/>
+          <p:cNvSpPr/>
+          <p:nvPr/>
+        </p:nvSpPr>
+        <p:spPr>
+          <a:xfrm>
+            <a:off x="731520" y="3566160"/>
+            <a:ext cx="5029200" cy="320040"/>
+          </a:xfrm>
+          <a:prstGeom prst="rect">
+            <a:avLst/>
+          </a:prstGeom>
+          <a:solidFill>
+            <a:srgbClr val="3A5362"/>
+          </a:solidFill>
+          <a:ln w="17780">
+            <a:solidFill>
+              <a:srgbClr val="B4C7D2"/>
+            </a:solidFill>
+          </a:ln>
+          <a:effectLst/>
+        </p:spPr>
+        <p:txBody>
+          <a:bodyPr rtlCol="0" anchor="ctr"/>
+          <a:lstStyle/>
+          <a:p>
+            <a:pPr algn="ctr"/>
+          </a:p>
+        </p:txBody>
+      </p:sp>
+      <p:sp>
+        <p:nvSpPr>
+          <p:cNvPr id="7" name="C4-E11 rect 5" descr="sci-ppt:o005"/>
+          <p:cNvSpPr/>
+          <p:nvPr/>
+        </p:nvSpPr>
+        <p:spPr>
+          <a:xfrm>
+            <a:off x="731520" y="2148840"/>
+            <a:ext cx="5029200" cy="1417320"/>
+          </a:xfrm>
+          <a:prstGeom prst="rect">
+            <a:avLst/>
+          </a:prstGeom>
+          <a:solidFill>
+            <a:srgbClr val="1E4A5A">
+              <a:alpha val="50000"/>
+            </a:srgbClr>
+          </a:solidFill>
+          <a:ln w="10160">
+            <a:solidFill>
+              <a:srgbClr val="B4C7D2">
+                <a:alpha val="50000"/>
+              </a:srgbClr>
+            </a:solidFill>
+          </a:ln>
+          <a:effectLst/>
+        </p:spPr>
+        <p:txBody>
+          <a:bodyPr rtlCol="0" anchor="ctr"/>
+          <a:lstStyle/>
+          <a:p>
+            <a:pPr algn="ctr"/>
+          </a:p>
+        </p:txBody>
+      </p:sp>
+      <p:sp>
+        <p:nvSpPr>
+          <p:cNvPr id="8" name="C4-E11 polygon 6" descr="sci-ppt:o006"/>
+          <p:cNvSpPr/>
+          <p:nvPr/>
+        </p:nvSpPr>
+        <p:spPr>
+          <a:xfrm>
+            <a:off x="731520" y="2743200"/>
+            <a:ext cx="2011680" cy="228600"/>
+          </a:xfrm>
+          <a:custGeom>
+            <a:avLst/>
+            <a:gdLst/>
+            <a:ahLst/>
+            <a:cxnLst/>
+            <a:rect l="l" t="t" r="r" b="b"/>
+            <a:pathLst>
+              <a:path w="2011680" h="228600">
+                <a:moveTo>
+                  <a:pt x="0" y="0"/>
+                </a:moveTo>
+                <a:lnTo>
+                  <a:pt x="2011680" y="0"/>
+                </a:lnTo>
+                <a:lnTo>
+                  <a:pt x="2011680" y="228600"/>
+                </a:lnTo>
+                <a:lnTo>
+                  <a:pt x="0" y="228600"/>
+                </a:lnTo>
+                <a:close/>
+              </a:path>
+            </a:pathLst>
+          </a:custGeom>
+          <a:solidFill>
+            <a:srgbClr val="142632"/>
+          </a:solidFill>
+          <a:ln w="25400">
+            <a:solidFill>
+              <a:srgbClr val="F2B880"/>
+            </a:solidFill>
+          </a:ln>
+          <a:effectLst/>
+        </p:spPr>
+        <p:txBody>
+          <a:bodyPr rtlCol="0" anchor="ctr"/>
+          <a:lstStyle/>
+          <a:p>
+            <a:pPr algn="ctr"/>
+          </a:p>
+        </p:txBody>
+      </p:sp>
+      <p:sp>
+        <p:nvSpPr>
+          <p:cNvPr id="9" name="C4-E11 text 7" descr="sci-ppt:o007"/>
+          <p:cNvSpPr txBox="1"/>
+          <p:nvPr/>
+        </p:nvSpPr>
+        <p:spPr>
+          <a:xfrm>
+            <a:off x="914400" y="2331720"/>
+            <a:ext cx="1645920" cy="223900"/>
+          </a:xfrm>
+          <a:prstGeom prst="rect">
+            <a:avLst/>
+          </a:prstGeom>
+          <a:noFill/>
+          <a:effectLst/>
+        </p:spPr>
+        <p:txBody>
+          <a:bodyPr wrap="none" lIns="18288" rIns="18288" tIns="18288" bIns="18288" anchor="t">
+            <a:spAutoFit/>
+          </a:bodyPr>
+          <a:lstStyle/>
+          <a:p>
+            <a:pPr algn="l">
+              <a:spcAft>
+                <a:spcPts val="0"/>
+              </a:spcAft>
+            </a:pPr>
+            <a:r>
+              <a:rPr sz="1150" b="1" i="0">
+                <a:solidFill>
+                  <a:srgbClr val="F2B880"/>
+                </a:solidFill>
+                <a:latin typeface="Arial"/>
+              </a:rPr>
+              <a:t>open crack</a:t>
+            </a:r>
+          </a:p>
+        </p:txBody>
+      </p:sp>
       <p:cxnSp>
         <p:nvCxnSpPr>
-          <p:cNvPr id="4" name="C4-E11 line 2" descr="sci-ppt:o002"/>
+          <p:cNvPr id="10" name="C4-E11 arrow 8" descr="sci-ppt:o008"/>
           <p:cNvCxnSpPr/>
           <p:nvPr/>
         </p:nvCxnSpPr>
         <p:spPr>
-          <a:xfrm flipV="1">
-            <a:off x="1097280" y="2467682"/>
-            <a:ext cx="96012" cy="1198"/>
+          <a:xfrm>
+            <a:off x="2743200" y="2852928"/>
+            <a:ext cx="914400" cy="0"/>
           </a:xfrm>
           <a:prstGeom prst="line">
             <a:avLst/>
           </a:prstGeom>
-          <a:ln w="25400">
+          <a:ln w="44450">
             <a:solidFill>
-              <a:srgbClr val="8EDBD4"/>
+              <a:srgbClr val="F28BA0"/>
             </a:solidFill>
+            <a:headEnd type="none" w="med" len="med"/>
+            <a:tailEnd type="triangle" w="med" len="med"/>
           </a:ln>
           <a:effectLst/>
         </p:spPr>
       </p:cxnSp>
-      <p:cxnSp>
-        <p:nvCxnSpPr>
-          <p:cNvPr id="5" name="C4-E11 line 3" descr="sci-ppt:o003"/>
-          <p:cNvCxnSpPr/>
+      <p:sp>
+        <p:nvSpPr>
+          <p:cNvPr id="11" name="C4-E11 text 9" descr="sci-ppt:o009"/>
+          <p:cNvSpPr txBox="1"/>
           <p:nvPr/>
-        </p:nvCxnSpPr>
-        <p:spPr>
-          <a:xfrm flipV="1">
-            <a:off x="1193292" y="2464095"/>
-            <a:ext cx="96012" cy="3587"/>
-          </a:xfrm>
-          <a:prstGeom prst="line">
+        </p:nvSpPr>
+        <p:spPr>
+          <a:xfrm>
+            <a:off x="2834640" y="2423160"/>
+            <a:ext cx="2743200" cy="223900"/>
+          </a:xfrm>
+          <a:prstGeom prst="rect">
             <a:avLst/>
           </a:prstGeom>
-          <a:ln w="25400">
-            <a:solidFill>
-              <a:srgbClr val="8EDBD4"/>
-            </a:solidFill>
-          </a:ln>
+          <a:noFill/>
           <a:effectLst/>
         </p:spPr>
-      </p:cxnSp>
-      <p:cxnSp>
-        <p:nvCxnSpPr>
-          <p:cNvPr id="6" name="C4-E11 line 4" descr="sci-ppt:o004"/>
-          <p:cNvCxnSpPr/>
+        <p:txBody>
+          <a:bodyPr wrap="none" lIns="18288" rIns="18288" tIns="18288" bIns="18288" anchor="t">
+            <a:spAutoFit/>
+          </a:bodyPr>
+          <a:lstStyle/>
+          <a:p>
+            <a:pPr algn="l">
+              <a:spcAft>
+                <a:spcPts val="0"/>
+              </a:spcAft>
+            </a:pPr>
+            <a:r>
+              <a:rPr sz="1150" b="1" i="0">
+                <a:solidFill>
+                  <a:srgbClr val="F28BA0"/>
+                </a:solidFill>
+                <a:latin typeface="Arial"/>
+              </a:rPr>
+              <a:t>advances by dA_c</a:t>
+            </a:r>
+          </a:p>
+        </p:txBody>
+      </p:sp>
+      <p:sp>
+        <p:nvSpPr>
+          <p:cNvPr id="12" name="C4-E11 text 10" descr="sci-ppt:o010"/>
+          <p:cNvSpPr txBox="1"/>
           <p:nvPr/>
-        </p:nvCxnSpPr>
-        <p:spPr>
-          <a:xfrm flipV="1">
-            <a:off x="1289304" y="2458142"/>
-            <a:ext cx="96012" cy="5953"/>
-          </a:xfrm>
-          <a:prstGeom prst="line">
+        </p:nvSpPr>
+        <p:spPr>
+          <a:xfrm>
+            <a:off x="548640" y="4206240"/>
+            <a:ext cx="5486400" cy="239395"/>
+          </a:xfrm>
+          <a:prstGeom prst="rect">
             <a:avLst/>
           </a:prstGeom>
-          <a:ln w="25400">
-            <a:solidFill>
-              <a:srgbClr val="8EDBD4"/>
-            </a:solidFill>
-          </a:ln>
+          <a:noFill/>
           <a:effectLst/>
         </p:spPr>
-      </p:cxnSp>
-      <p:cxnSp>
-        <p:nvCxnSpPr>
-          <p:cNvPr id="7" name="C4-E11 line 5" descr="sci-ppt:o005"/>
-          <p:cNvCxnSpPr/>
+        <p:txBody>
+          <a:bodyPr wrap="none" lIns="18288" rIns="18288" tIns="18288" bIns="18288" anchor="t">
+            <a:spAutoFit/>
+          </a:bodyPr>
+          <a:lstStyle/>
+          <a:p>
+            <a:pPr algn="l">
+              <a:spcAft>
+                <a:spcPts val="0"/>
+              </a:spcAft>
+            </a:pPr>
+            <a:r>
+              <a:rPr sz="1250" b="1" i="0">
+                <a:solidFill>
+                  <a:srgbClr val="E7F0F3"/>
+                </a:solidFill>
+                <a:latin typeface="Arial"/>
+              </a:rPr>
+              <a:t>G = −∂𝒫/∂A_c |𝒞   (𝒞 = the chosen load control)</a:t>
+            </a:r>
+          </a:p>
+        </p:txBody>
+      </p:sp>
+      <p:sp>
+        <p:nvSpPr>
+          <p:cNvPr id="13" name="C4-E11 text 11" descr="sci-ppt:o011"/>
+          <p:cNvSpPr txBox="1"/>
           <p:nvPr/>
-        </p:nvCxnSpPr>
-        <p:spPr>
-          <a:xfrm flipV="1">
-            <a:off x="1385316" y="2449859"/>
-            <a:ext cx="96012" cy="8283"/>
-          </a:xfrm>
-          <a:prstGeom prst="line">
+        </p:nvSpPr>
+        <p:spPr>
+          <a:xfrm>
+            <a:off x="548640" y="4663440"/>
+            <a:ext cx="5486400" cy="239395"/>
+          </a:xfrm>
+          <a:prstGeom prst="rect">
             <a:avLst/>
           </a:prstGeom>
-          <a:ln w="25400">
-            <a:solidFill>
-              <a:srgbClr val="8EDBD4"/>
-            </a:solidFill>
-          </a:ln>
+          <a:noFill/>
           <a:effectLst/>
         </p:spPr>
-      </p:cxnSp>
-      <p:cxnSp>
-        <p:nvCxnSpPr>
-          <p:cNvPr id="8" name="C4-E11 line 6" descr="sci-ppt:o006"/>
-          <p:cNvCxnSpPr/>
+        <p:txBody>
+          <a:bodyPr wrap="none" lIns="18288" rIns="18288" tIns="18288" bIns="18288" anchor="t">
+            <a:spAutoFit/>
+          </a:bodyPr>
+          <a:lstStyle/>
+          <a:p>
+            <a:pPr algn="l">
+              <a:spcAft>
+                <a:spcPts val="0"/>
+              </a:spcAft>
+            </a:pPr>
+            <a:r>
+              <a:rPr sz="1250" b="1" i="0">
+                <a:solidFill>
+                  <a:srgbClr val="F2B880"/>
+                </a:solidFill>
+                <a:latin typeface="Arial"/>
+              </a:rPr>
+              <a:t>Fracture advances when G ≥ Γ(ψ, Tᵢ, v_c).</a:t>
+            </a:r>
+          </a:p>
+        </p:txBody>
+      </p:sp>
+      <p:sp>
+        <p:nvSpPr>
+          <p:cNvPr id="14" name="C4-E11 text 12" descr="sci-ppt:o012"/>
+          <p:cNvSpPr txBox="1"/>
           <p:nvPr/>
-        </p:nvCxnSpPr>
-        <p:spPr>
-          <a:xfrm flipV="1">
-            <a:off x="1481328" y="2439298"/>
-            <a:ext cx="96012" cy="10561"/>
-          </a:xfrm>
-          <a:prstGeom prst="line">
+        </p:nvSpPr>
+        <p:spPr>
+          <a:xfrm>
+            <a:off x="548640" y="5166360"/>
+            <a:ext cx="5486400" cy="223900"/>
+          </a:xfrm>
+          <a:prstGeom prst="rect">
             <a:avLst/>
           </a:prstGeom>
-          <a:ln w="25400">
-            <a:solidFill>
-              <a:srgbClr val="8EDBD4"/>
-            </a:solidFill>
-          </a:ln>
+          <a:noFill/>
           <a:effectLst/>
         </p:spPr>
-      </p:cxnSp>
-      <p:cxnSp>
-        <p:nvCxnSpPr>
-          <p:cNvPr id="9" name="C4-E11 line 7" descr="sci-ppt:o007"/>
-          <p:cNvCxnSpPr/>
-          <p:nvPr/>
-        </p:nvCxnSpPr>
-        <p:spPr>
-          <a:xfrm flipV="1">
-            <a:off x="1577340" y="2426522"/>
-            <a:ext cx="96012" cy="12776"/>
-          </a:xfrm>
-          <a:prstGeom prst="line">
-            <a:avLst/>
-          </a:prstGeom>
-          <a:ln w="25400">
-            <a:solidFill>
-              <a:srgbClr val="8EDBD4"/>
-            </a:solidFill>
-          </a:ln>
-          <a:effectLst/>
-        </p:spPr>
-      </p:cxnSp>
-      <p:cxnSp>
-        <p:nvCxnSpPr>
-          <p:cNvPr id="10" name="C4-E11 line 8" descr="sci-ppt:o008"/>
-          <p:cNvCxnSpPr/>
-          <p:nvPr/>
-        </p:nvCxnSpPr>
-        <p:spPr>
-          <a:xfrm flipV="1">
-            <a:off x="1673352" y="2411613"/>
-            <a:ext cx="96012" cy="14909"/>
-          </a:xfrm>
-          <a:prstGeom prst="line">
-            <a:avLst/>
-          </a:prstGeom>
-          <a:ln w="25400">
-            <a:solidFill>
-              <a:srgbClr val="8EDBD4"/>
-            </a:solidFill>
-          </a:ln>
-          <a:effectLst/>
-        </p:spPr>
-      </p:cxnSp>
-      <p:cxnSp>
-        <p:nvCxnSpPr>
-          <p:cNvPr id="11" name="C4-E11 line 9" descr="sci-ppt:o009"/>
-          <p:cNvCxnSpPr/>
-          <p:nvPr/>
-        </p:nvCxnSpPr>
-        <p:spPr>
-          <a:xfrm flipV="1">
-            <a:off x="1769364" y="2394660"/>
-            <a:ext cx="96012" cy="16953"/>
-          </a:xfrm>
-          <a:prstGeom prst="line">
-            <a:avLst/>
-          </a:prstGeom>
-          <a:ln w="25400">
-            <a:solidFill>
-              <a:srgbClr val="8EDBD4"/>
-            </a:solidFill>
-          </a:ln>
-          <a:effectLst/>
-        </p:spPr>
-      </p:cxnSp>
-      <p:cxnSp>
-        <p:nvCxnSpPr>
-          <p:cNvPr id="12" name="C4-E11 line 10" descr="sci-ppt:o010"/>
-          <p:cNvCxnSpPr/>
-          <p:nvPr/>
-        </p:nvCxnSpPr>
-        <p:spPr>
-          <a:xfrm flipV="1">
-            <a:off x="1865376" y="2375768"/>
-            <a:ext cx="96012" cy="18892"/>
-          </a:xfrm>
-          <a:prstGeom prst="line">
-            <a:avLst/>
-          </a:prstGeom>
-          <a:ln w="25400">
-            <a:solidFill>
-              <a:srgbClr val="8EDBD4"/>
-            </a:solidFill>
-          </a:ln>
-          <a:effectLst/>
-        </p:spPr>
-      </p:cxnSp>
-      <p:cxnSp>
-        <p:nvCxnSpPr>
-          <p:cNvPr id="13" name="C4-E11 line 11" descr="sci-ppt:o011"/>
-          <p:cNvCxnSpPr/>
-          <p:nvPr/>
-        </p:nvCxnSpPr>
-        <p:spPr>
-          <a:xfrm flipV="1">
-            <a:off x="1961388" y="2355055"/>
-            <a:ext cx="96012" cy="20713"/>
-          </a:xfrm>
-          <a:prstGeom prst="line">
-            <a:avLst/>
-          </a:prstGeom>
-          <a:ln w="25400">
-            <a:solidFill>
-              <a:srgbClr val="8EDBD4"/>
-            </a:solidFill>
-          </a:ln>
-          <a:effectLst/>
-        </p:spPr>
-      </p:cxnSp>
-      <p:cxnSp>
-        <p:nvCxnSpPr>
-          <p:cNvPr id="14" name="C4-E11 line 12" descr="sci-ppt:o012"/>
-          <p:cNvCxnSpPr/>
-          <p:nvPr/>
-        </p:nvCxnSpPr>
-        <p:spPr>
-          <a:xfrm flipV="1">
-            <a:off x="2057400" y="2332648"/>
-            <a:ext cx="96012" cy="22407"/>
-          </a:xfrm>
-          <a:prstGeom prst="line">
-            <a:avLst/>
-          </a:prstGeom>
-          <a:ln w="25400">
-            <a:solidFill>
-              <a:srgbClr val="8EDBD4"/>
-            </a:solidFill>
-          </a:ln>
-          <a:effectLst/>
-        </p:spPr>
-      </p:cxnSp>
+        <p:txBody>
+          <a:bodyPr wrap="none" lIns="18288" rIns="18288" tIns="18288" bIns="18288" anchor="t">
+            <a:spAutoFit/>
+          </a:bodyPr>
+          <a:lstStyle/>
+          <a:p>
+            <a:pPr algn="l">
+              <a:spcAft>
+                <a:spcPts val="0"/>
+              </a:spcAft>
+            </a:pPr>
+            <a:r>
+              <a:rPr sz="1150" b="0" i="0">
+                <a:solidFill>
+                  <a:srgbClr val="B4C7D2"/>
+                </a:solidFill>
+                <a:latin typeface="Arial"/>
+              </a:rPr>
+              <a:t>𝒫 depends on the control: fixed load and fixed displacement differ.</a:t>
+            </a:r>
+          </a:p>
+        </p:txBody>
+      </p:sp>
       <p:cxnSp>
         <p:nvCxnSpPr>
           <p:cNvPr id="15" name="C4-E11 line 13" descr="sci-ppt:o013"/>
@@ -3407,16 +3592,16 @@
           <p:nvPr/>
         </p:nvCxnSpPr>
         <p:spPr>
-          <a:xfrm flipV="1">
-            <a:off x="2153412" y="2308685"/>
-            <a:ext cx="96012" cy="23963"/>
+          <a:xfrm>
+            <a:off x="6858000" y="4663440"/>
+            <a:ext cx="4846320" cy="0"/>
           </a:xfrm>
           <a:prstGeom prst="line">
             <a:avLst/>
           </a:prstGeom>
-          <a:ln w="25400">
+          <a:ln w="19050">
             <a:solidFill>
-              <a:srgbClr val="8EDBD4"/>
+              <a:srgbClr val="B4C7D2"/>
             </a:solidFill>
           </a:ln>
           <a:effectLst/>
@@ -3429,16 +3614,16 @@
           <p:nvPr/>
         </p:nvCxnSpPr>
         <p:spPr>
-          <a:xfrm flipV="1">
-            <a:off x="2249424" y="2283313"/>
-            <a:ext cx="96012" cy="25372"/>
+          <a:xfrm>
+            <a:off x="6858000" y="1371600"/>
+            <a:ext cx="0" cy="3291840"/>
           </a:xfrm>
           <a:prstGeom prst="line">
             <a:avLst/>
           </a:prstGeom>
-          <a:ln w="25400">
+          <a:ln w="19050">
             <a:solidFill>
-              <a:srgbClr val="8EDBD4"/>
+              <a:srgbClr val="B4C7D2"/>
             </a:solidFill>
           </a:ln>
           <a:effectLst/>
@@ -3451,16 +3636,16 @@
           <p:nvPr/>
         </p:nvCxnSpPr>
         <p:spPr>
-          <a:xfrm flipV="1">
-            <a:off x="2345436" y="2256689"/>
-            <a:ext cx="96012" cy="26624"/>
+          <a:xfrm>
+            <a:off x="6858000" y="4663440"/>
+            <a:ext cx="0" cy="64008"/>
           </a:xfrm>
           <a:prstGeom prst="line">
             <a:avLst/>
           </a:prstGeom>
-          <a:ln w="25400">
+          <a:ln w="12700">
             <a:solidFill>
-              <a:srgbClr val="8EDBD4"/>
+              <a:srgbClr val="B4C7D2"/>
             </a:solidFill>
           </a:ln>
           <a:effectLst/>
@@ -3473,43 +3658,61 @@
           <p:nvPr/>
         </p:nvCxnSpPr>
         <p:spPr>
-          <a:xfrm flipV="1">
-            <a:off x="2441448" y="2228978"/>
-            <a:ext cx="96012" cy="27711"/>
+          <a:xfrm>
+            <a:off x="6858000" y="1371600"/>
+            <a:ext cx="0" cy="3291840"/>
           </a:xfrm>
           <a:prstGeom prst="line">
             <a:avLst/>
           </a:prstGeom>
-          <a:ln w="25400">
+          <a:ln w="7620">
             <a:solidFill>
-              <a:srgbClr val="8EDBD4"/>
+              <a:srgbClr val="2E4756"/>
             </a:solidFill>
           </a:ln>
           <a:effectLst/>
         </p:spPr>
       </p:cxnSp>
-      <p:cxnSp>
-        <p:nvCxnSpPr>
-          <p:cNvPr id="19" name="C4-E11 line 17" descr="sci-ppt:o017"/>
-          <p:cNvCxnSpPr/>
+      <p:sp>
+        <p:nvSpPr>
+          <p:cNvPr id="19" name="C4-E11 text 17" descr="sci-ppt:o017"/>
+          <p:cNvSpPr txBox="1"/>
           <p:nvPr/>
-        </p:nvCxnSpPr>
-        <p:spPr>
-          <a:xfrm flipV="1">
-            <a:off x="2537460" y="2200350"/>
-            <a:ext cx="96012" cy="28628"/>
-          </a:xfrm>
-          <a:prstGeom prst="line">
+        </p:nvSpPr>
+        <p:spPr>
+          <a:xfrm>
+            <a:off x="6400800" y="4745736"/>
+            <a:ext cx="914400" cy="208407"/>
+          </a:xfrm>
+          <a:prstGeom prst="rect">
             <a:avLst/>
           </a:prstGeom>
-          <a:ln w="25400">
-            <a:solidFill>
-              <a:srgbClr val="8EDBD4"/>
-            </a:solidFill>
-          </a:ln>
+          <a:noFill/>
           <a:effectLst/>
         </p:spPr>
-      </p:cxnSp>
+        <p:txBody>
+          <a:bodyPr wrap="none" lIns="18288" rIns="18288" tIns="18288" bIns="18288" anchor="t">
+            <a:spAutoFit/>
+          </a:bodyPr>
+          <a:lstStyle/>
+          <a:p>
+            <a:pPr algn="ctr">
+              <a:spcAft>
+                <a:spcPts val="0"/>
+              </a:spcAft>
+            </a:pPr>
+            <a:r>
+              <a:rPr sz="1050" b="0" i="0">
+                <a:solidFill>
+                  <a:srgbClr val="B4C7D2"/>
+                </a:solidFill>
+                <a:latin typeface="Arial"/>
+              </a:rPr>
+              <a:t>0</a:t>
+            </a:r>
+          </a:p>
+        </p:txBody>
+      </p:sp>
       <p:cxnSp>
         <p:nvCxnSpPr>
           <p:cNvPr id="20" name="C4-E11 line 18" descr="sci-ppt:o018"/>
@@ -3517,16 +3720,16 @@
           <p:nvPr/>
         </p:nvCxnSpPr>
         <p:spPr>
-          <a:xfrm flipV="1">
-            <a:off x="2633472" y="2170981"/>
-            <a:ext cx="96012" cy="29369"/>
+          <a:xfrm>
+            <a:off x="8796528" y="4663440"/>
+            <a:ext cx="0" cy="64008"/>
           </a:xfrm>
           <a:prstGeom prst="line">
             <a:avLst/>
           </a:prstGeom>
-          <a:ln w="25400">
+          <a:ln w="12700">
             <a:solidFill>
-              <a:srgbClr val="8EDBD4"/>
+              <a:srgbClr val="B4C7D2"/>
             </a:solidFill>
           </a:ln>
           <a:effectLst/>
@@ -3539,43 +3742,61 @@
           <p:nvPr/>
         </p:nvCxnSpPr>
         <p:spPr>
-          <a:xfrm flipV="1">
-            <a:off x="2729484" y="2141053"/>
-            <a:ext cx="96012" cy="29928"/>
+          <a:xfrm>
+            <a:off x="8796528" y="1371600"/>
+            <a:ext cx="0" cy="3291840"/>
           </a:xfrm>
           <a:prstGeom prst="line">
             <a:avLst/>
           </a:prstGeom>
-          <a:ln w="25400">
+          <a:ln w="7620">
             <a:solidFill>
-              <a:srgbClr val="8EDBD4"/>
+              <a:srgbClr val="2E4756"/>
             </a:solidFill>
           </a:ln>
           <a:effectLst/>
         </p:spPr>
       </p:cxnSp>
-      <p:cxnSp>
-        <p:nvCxnSpPr>
-          <p:cNvPr id="22" name="C4-E11 line 20" descr="sci-ppt:o020"/>
-          <p:cNvCxnSpPr/>
+      <p:sp>
+        <p:nvSpPr>
+          <p:cNvPr id="22" name="C4-E11 text 20" descr="sci-ppt:o020"/>
+          <p:cNvSpPr txBox="1"/>
           <p:nvPr/>
-        </p:nvCxnSpPr>
-        <p:spPr>
-          <a:xfrm flipV="1">
-            <a:off x="2825496" y="2110750"/>
-            <a:ext cx="96012" cy="30303"/>
-          </a:xfrm>
-          <a:prstGeom prst="line">
+        </p:nvSpPr>
+        <p:spPr>
+          <a:xfrm>
+            <a:off x="8339328" y="4745736"/>
+            <a:ext cx="914400" cy="208407"/>
+          </a:xfrm>
+          <a:prstGeom prst="rect">
             <a:avLst/>
           </a:prstGeom>
-          <a:ln w="25400">
-            <a:solidFill>
-              <a:srgbClr val="8EDBD4"/>
-            </a:solidFill>
-          </a:ln>
+          <a:noFill/>
           <a:effectLst/>
         </p:spPr>
-      </p:cxnSp>
+        <p:txBody>
+          <a:bodyPr wrap="none" lIns="18288" rIns="18288" tIns="18288" bIns="18288" anchor="t">
+            <a:spAutoFit/>
+          </a:bodyPr>
+          <a:lstStyle/>
+          <a:p>
+            <a:pPr algn="ctr">
+              <a:spcAft>
+                <a:spcPts val="0"/>
+              </a:spcAft>
+            </a:pPr>
+            <a:r>
+              <a:rPr sz="1050" b="0" i="0">
+                <a:solidFill>
+                  <a:srgbClr val="B4C7D2"/>
+                </a:solidFill>
+                <a:latin typeface="Arial"/>
+              </a:rPr>
+              <a:t>1</a:t>
+            </a:r>
+          </a:p>
+        </p:txBody>
+      </p:sp>
       <p:cxnSp>
         <p:nvCxnSpPr>
           <p:cNvPr id="23" name="C4-E11 line 21" descr="sci-ppt:o021"/>
@@ -3583,16 +3804,16 @@
           <p:nvPr/>
         </p:nvCxnSpPr>
         <p:spPr>
-          <a:xfrm flipV="1">
-            <a:off x="2921508" y="2080260"/>
-            <a:ext cx="96012" cy="30490"/>
+          <a:xfrm>
+            <a:off x="10735056" y="4663440"/>
+            <a:ext cx="0" cy="64008"/>
           </a:xfrm>
           <a:prstGeom prst="line">
             <a:avLst/>
           </a:prstGeom>
-          <a:ln w="25400">
+          <a:ln w="12700">
             <a:solidFill>
-              <a:srgbClr val="8EDBD4"/>
+              <a:srgbClr val="B4C7D2"/>
             </a:solidFill>
           </a:ln>
           <a:effectLst/>
@@ -3605,43 +3826,61 @@
           <p:nvPr/>
         </p:nvCxnSpPr>
         <p:spPr>
-          <a:xfrm flipV="1">
-            <a:off x="3017520" y="2049769"/>
-            <a:ext cx="96012" cy="30491"/>
+          <a:xfrm>
+            <a:off x="10735056" y="1371600"/>
+            <a:ext cx="0" cy="3291840"/>
           </a:xfrm>
           <a:prstGeom prst="line">
             <a:avLst/>
           </a:prstGeom>
-          <a:ln w="25400">
+          <a:ln w="7620">
             <a:solidFill>
-              <a:srgbClr val="8EDBD4"/>
+              <a:srgbClr val="2E4756"/>
             </a:solidFill>
           </a:ln>
           <a:effectLst/>
         </p:spPr>
       </p:cxnSp>
-      <p:cxnSp>
-        <p:nvCxnSpPr>
-          <p:cNvPr id="25" name="C4-E11 line 23" descr="sci-ppt:o023"/>
-          <p:cNvCxnSpPr/>
+      <p:sp>
+        <p:nvSpPr>
+          <p:cNvPr id="25" name="C4-E11 text 23" descr="sci-ppt:o023"/>
+          <p:cNvSpPr txBox="1"/>
           <p:nvPr/>
-        </p:nvCxnSpPr>
-        <p:spPr>
-          <a:xfrm flipV="1">
-            <a:off x="3113532" y="2019466"/>
-            <a:ext cx="96012" cy="30303"/>
-          </a:xfrm>
-          <a:prstGeom prst="line">
+        </p:nvSpPr>
+        <p:spPr>
+          <a:xfrm>
+            <a:off x="10277856" y="4745736"/>
+            <a:ext cx="914400" cy="208407"/>
+          </a:xfrm>
+          <a:prstGeom prst="rect">
             <a:avLst/>
           </a:prstGeom>
-          <a:ln w="25400">
-            <a:solidFill>
-              <a:srgbClr val="8EDBD4"/>
-            </a:solidFill>
-          </a:ln>
+          <a:noFill/>
           <a:effectLst/>
         </p:spPr>
-      </p:cxnSp>
+        <p:txBody>
+          <a:bodyPr wrap="none" lIns="18288" rIns="18288" tIns="18288" bIns="18288" anchor="t">
+            <a:spAutoFit/>
+          </a:bodyPr>
+          <a:lstStyle/>
+          <a:p>
+            <a:pPr algn="ctr">
+              <a:spcAft>
+                <a:spcPts val="0"/>
+              </a:spcAft>
+            </a:pPr>
+            <a:r>
+              <a:rPr sz="1050" b="0" i="0">
+                <a:solidFill>
+                  <a:srgbClr val="B4C7D2"/>
+                </a:solidFill>
+                <a:latin typeface="Arial"/>
+              </a:rPr>
+              <a:t>2</a:t>
+            </a:r>
+          </a:p>
+        </p:txBody>
+      </p:sp>
       <p:cxnSp>
         <p:nvCxnSpPr>
           <p:cNvPr id="26" name="C4-E11 line 24" descr="sci-ppt:o024"/>
@@ -3649,16 +3888,16 @@
           <p:nvPr/>
         </p:nvCxnSpPr>
         <p:spPr>
-          <a:xfrm flipV="1">
-            <a:off x="3209544" y="1989538"/>
-            <a:ext cx="96012" cy="29928"/>
+          <a:xfrm>
+            <a:off x="6793992" y="4663440"/>
+            <a:ext cx="64008" cy="0"/>
           </a:xfrm>
           <a:prstGeom prst="line">
             <a:avLst/>
           </a:prstGeom>
-          <a:ln w="25400">
+          <a:ln w="12700">
             <a:solidFill>
-              <a:srgbClr val="8EDBD4"/>
+              <a:srgbClr val="B4C7D2"/>
             </a:solidFill>
           </a:ln>
           <a:effectLst/>
@@ -3671,16 +3910,16 @@
           <p:nvPr/>
         </p:nvCxnSpPr>
         <p:spPr>
-          <a:xfrm flipV="1">
-            <a:off x="3305556" y="1960169"/>
-            <a:ext cx="96012" cy="29369"/>
+          <a:xfrm>
+            <a:off x="6793992" y="1920239"/>
+            <a:ext cx="64008" cy="0"/>
           </a:xfrm>
           <a:prstGeom prst="line">
             <a:avLst/>
           </a:prstGeom>
-          <a:ln w="25400">
+          <a:ln w="12700">
             <a:solidFill>
-              <a:srgbClr val="8EDBD4"/>
+              <a:srgbClr val="B4C7D2"/>
             </a:solidFill>
           </a:ln>
           <a:effectLst/>
@@ -3693,109 +3932,191 @@
           <p:nvPr/>
         </p:nvCxnSpPr>
         <p:spPr>
-          <a:xfrm flipV="1">
-            <a:off x="3401568" y="1931541"/>
-            <a:ext cx="96012" cy="28628"/>
+          <a:xfrm>
+            <a:off x="6858000" y="1920239"/>
+            <a:ext cx="4846320" cy="0"/>
           </a:xfrm>
           <a:prstGeom prst="line">
             <a:avLst/>
           </a:prstGeom>
-          <a:ln w="25400">
+          <a:ln w="7620">
+            <a:solidFill>
+              <a:srgbClr val="2E4756"/>
+            </a:solidFill>
+          </a:ln>
+          <a:effectLst/>
+        </p:spPr>
+      </p:cxnSp>
+      <p:sp>
+        <p:nvSpPr>
+          <p:cNvPr id="29" name="C4-E11 text 27" descr="sci-ppt:o027"/>
+          <p:cNvSpPr txBox="1"/>
+          <p:nvPr/>
+        </p:nvSpPr>
+        <p:spPr>
+          <a:xfrm>
+            <a:off x="5989320" y="1837943"/>
+            <a:ext cx="777240" cy="208407"/>
+          </a:xfrm>
+          <a:prstGeom prst="rect">
+            <a:avLst/>
+          </a:prstGeom>
+          <a:noFill/>
+          <a:effectLst/>
+        </p:spPr>
+        <p:txBody>
+          <a:bodyPr wrap="none" lIns="18288" rIns="18288" tIns="18288" bIns="18288" anchor="t">
+            <a:spAutoFit/>
+          </a:bodyPr>
+          <a:lstStyle/>
+          <a:p>
+            <a:pPr algn="r">
+              <a:spcAft>
+                <a:spcPts val="0"/>
+              </a:spcAft>
+            </a:pPr>
+            <a:r>
+              <a:rPr sz="1050" b="0" i="0">
+                <a:solidFill>
+                  <a:srgbClr val="B4C7D2"/>
+                </a:solidFill>
+                <a:latin typeface="Arial"/>
+              </a:rPr>
+              <a:t>1</a:t>
+            </a:r>
+          </a:p>
+        </p:txBody>
+      </p:sp>
+      <p:sp>
+        <p:nvSpPr>
+          <p:cNvPr id="30" name="C4-E11 text 28" descr="sci-ppt:o028"/>
+          <p:cNvSpPr txBox="1"/>
+          <p:nvPr/>
+        </p:nvSpPr>
+        <p:spPr>
+          <a:xfrm>
+            <a:off x="6858000" y="4946903"/>
+            <a:ext cx="4846320" cy="231648"/>
+          </a:xfrm>
+          <a:prstGeom prst="rect">
+            <a:avLst/>
+          </a:prstGeom>
+          <a:noFill/>
+          <a:effectLst/>
+        </p:spPr>
+        <p:txBody>
+          <a:bodyPr wrap="none" lIns="18288" rIns="18288" tIns="18288" bIns="18288" anchor="t">
+            <a:spAutoFit/>
+          </a:bodyPr>
+          <a:lstStyle/>
+          <a:p>
+            <a:pPr algn="ctr">
+              <a:spcAft>
+                <a:spcPts val="0"/>
+              </a:spcAft>
+            </a:pPr>
+            <a:r>
+              <a:rPr sz="1200" b="0" i="0">
+                <a:solidFill>
+                  <a:srgbClr val="E7F0F3"/>
+                </a:solidFill>
+                <a:latin typeface="Arial"/>
+              </a:rPr>
+              <a:t>driving force G / Γ</a:t>
+            </a:r>
+          </a:p>
+        </p:txBody>
+      </p:sp>
+      <p:sp>
+        <p:nvSpPr>
+          <p:cNvPr id="31" name="C4-E11 text 29" descr="sci-ppt:o029"/>
+          <p:cNvSpPr txBox="1"/>
+          <p:nvPr/>
+        </p:nvSpPr>
+        <p:spPr>
+          <a:xfrm>
+            <a:off x="6309360" y="1024128"/>
+            <a:ext cx="4846320" cy="231648"/>
+          </a:xfrm>
+          <a:prstGeom prst="rect">
+            <a:avLst/>
+          </a:prstGeom>
+          <a:noFill/>
+          <a:effectLst/>
+        </p:spPr>
+        <p:txBody>
+          <a:bodyPr wrap="none" lIns="18288" rIns="18288" tIns="18288" bIns="18288" anchor="t">
+            <a:spAutoFit/>
+          </a:bodyPr>
+          <a:lstStyle/>
+          <a:p>
+            <a:pPr algn="l">
+              <a:spcAft>
+                <a:spcPts val="0"/>
+              </a:spcAft>
+            </a:pPr>
+            <a:r>
+              <a:rPr sz="1200" b="0" i="0">
+                <a:solidFill>
+                  <a:srgbClr val="E7F0F3"/>
+                </a:solidFill>
+                <a:latin typeface="Arial"/>
+              </a:rPr>
+              <a:t>crack state</a:t>
+            </a:r>
+          </a:p>
+        </p:txBody>
+      </p:sp>
+      <p:sp>
+        <p:nvSpPr>
+          <p:cNvPr id="32" name="C4-E11 polygon 30" descr="sci-ppt:o030"/>
+          <p:cNvSpPr/>
+          <p:nvPr/>
+        </p:nvSpPr>
+        <p:spPr>
+          <a:xfrm>
+            <a:off x="6858000" y="1920239"/>
+            <a:ext cx="4846320" cy="2743201"/>
+          </a:xfrm>
+          <a:custGeom>
+            <a:avLst/>
+            <a:gdLst/>
+            <a:ahLst/>
+            <a:cxnLst/>
+            <a:rect l="l" t="t" r="r" b="b"/>
+            <a:pathLst>
+              <a:path w="4846320" h="2743201">
+                <a:moveTo>
+                  <a:pt x="0" y="2743201"/>
+                </a:moveTo>
+                <a:lnTo>
+                  <a:pt x="1938528" y="2743201"/>
+                </a:lnTo>
+                <a:lnTo>
+                  <a:pt x="1938528" y="0"/>
+                </a:lnTo>
+                <a:lnTo>
+                  <a:pt x="4846320" y="0"/>
+                </a:lnTo>
+              </a:path>
+            </a:pathLst>
+          </a:custGeom>
+          <a:noFill/>
+          <a:ln w="38100">
             <a:solidFill>
               <a:srgbClr val="8EDBD4"/>
             </a:solidFill>
           </a:ln>
           <a:effectLst/>
         </p:spPr>
-      </p:cxnSp>
-      <p:cxnSp>
-        <p:nvCxnSpPr>
-          <p:cNvPr id="29" name="C4-E11 line 27" descr="sci-ppt:o027"/>
-          <p:cNvCxnSpPr/>
-          <p:nvPr/>
-        </p:nvCxnSpPr>
-        <p:spPr>
-          <a:xfrm flipV="1">
-            <a:off x="3497580" y="1903830"/>
-            <a:ext cx="96011" cy="27711"/>
-          </a:xfrm>
-          <a:prstGeom prst="line">
-            <a:avLst/>
-          </a:prstGeom>
-          <a:ln w="25400">
-            <a:solidFill>
-              <a:srgbClr val="8EDBD4"/>
-            </a:solidFill>
-          </a:ln>
-          <a:effectLst/>
-        </p:spPr>
-      </p:cxnSp>
-      <p:cxnSp>
-        <p:nvCxnSpPr>
-          <p:cNvPr id="30" name="C4-E11 line 28" descr="sci-ppt:o028"/>
-          <p:cNvCxnSpPr/>
-          <p:nvPr/>
-        </p:nvCxnSpPr>
-        <p:spPr>
-          <a:xfrm flipV="1">
-            <a:off x="3593591" y="1877206"/>
-            <a:ext cx="96013" cy="26624"/>
-          </a:xfrm>
-          <a:prstGeom prst="line">
-            <a:avLst/>
-          </a:prstGeom>
-          <a:ln w="25400">
-            <a:solidFill>
-              <a:srgbClr val="8EDBD4"/>
-            </a:solidFill>
-          </a:ln>
-          <a:effectLst/>
-        </p:spPr>
-      </p:cxnSp>
-      <p:cxnSp>
-        <p:nvCxnSpPr>
-          <p:cNvPr id="31" name="C4-E11 line 29" descr="sci-ppt:o029"/>
-          <p:cNvCxnSpPr/>
-          <p:nvPr/>
-        </p:nvCxnSpPr>
-        <p:spPr>
-          <a:xfrm flipV="1">
-            <a:off x="3689604" y="1851834"/>
-            <a:ext cx="96011" cy="25372"/>
-          </a:xfrm>
-          <a:prstGeom prst="line">
-            <a:avLst/>
-          </a:prstGeom>
-          <a:ln w="25400">
-            <a:solidFill>
-              <a:srgbClr val="8EDBD4"/>
-            </a:solidFill>
-          </a:ln>
-          <a:effectLst/>
-        </p:spPr>
-      </p:cxnSp>
-      <p:cxnSp>
-        <p:nvCxnSpPr>
-          <p:cNvPr id="32" name="C4-E11 line 30" descr="sci-ppt:o030"/>
-          <p:cNvCxnSpPr/>
-          <p:nvPr/>
-        </p:nvCxnSpPr>
-        <p:spPr>
-          <a:xfrm flipV="1">
-            <a:off x="3785615" y="1827871"/>
-            <a:ext cx="96013" cy="23963"/>
-          </a:xfrm>
-          <a:prstGeom prst="line">
-            <a:avLst/>
-          </a:prstGeom>
-          <a:ln w="25400">
-            <a:solidFill>
-              <a:srgbClr val="8EDBD4"/>
-            </a:solidFill>
-          </a:ln>
-          <a:effectLst/>
-        </p:spPr>
-      </p:cxnSp>
+        <p:txBody>
+          <a:bodyPr rtlCol="0" anchor="ctr"/>
+          <a:lstStyle/>
+          <a:p>
+            <a:pPr algn="ctr"/>
+          </a:p>
+        </p:txBody>
+      </p:sp>
       <p:cxnSp>
         <p:nvCxnSpPr>
           <p:cNvPr id="33" name="C4-E11 line 31" descr="sci-ppt:o031"/>
@@ -3803,1291 +4124,32 @@
           <p:nvPr/>
         </p:nvCxnSpPr>
         <p:spPr>
-          <a:xfrm flipV="1">
-            <a:off x="3881628" y="1805464"/>
-            <a:ext cx="96011" cy="22407"/>
+          <a:xfrm>
+            <a:off x="8796528" y="1371600"/>
+            <a:ext cx="0" cy="3291840"/>
           </a:xfrm>
           <a:prstGeom prst="line">
             <a:avLst/>
           </a:prstGeom>
-          <a:ln w="25400">
+          <a:ln w="16510">
             <a:solidFill>
-              <a:srgbClr val="8EDBD4"/>
+              <a:srgbClr val="F2B880"/>
             </a:solidFill>
+            <a:prstDash val="dash"/>
           </a:ln>
           <a:effectLst/>
         </p:spPr>
       </p:cxnSp>
-      <p:cxnSp>
-        <p:nvCxnSpPr>
-          <p:cNvPr id="34" name="C4-E11 line 32" descr="sci-ppt:o032"/>
-          <p:cNvCxnSpPr/>
-          <p:nvPr/>
-        </p:nvCxnSpPr>
-        <p:spPr>
-          <a:xfrm flipV="1">
-            <a:off x="3977639" y="1784751"/>
-            <a:ext cx="96013" cy="20713"/>
-          </a:xfrm>
-          <a:prstGeom prst="line">
-            <a:avLst/>
-          </a:prstGeom>
-          <a:ln w="25400">
-            <a:solidFill>
-              <a:srgbClr val="8EDBD4"/>
-            </a:solidFill>
-          </a:ln>
-          <a:effectLst/>
-        </p:spPr>
-      </p:cxnSp>
-      <p:cxnSp>
-        <p:nvCxnSpPr>
-          <p:cNvPr id="35" name="C4-E11 line 33" descr="sci-ppt:o033"/>
-          <p:cNvCxnSpPr/>
-          <p:nvPr/>
-        </p:nvCxnSpPr>
-        <p:spPr>
-          <a:xfrm flipV="1">
-            <a:off x="4073652" y="1765859"/>
-            <a:ext cx="96011" cy="18892"/>
-          </a:xfrm>
-          <a:prstGeom prst="line">
-            <a:avLst/>
-          </a:prstGeom>
-          <a:ln w="25400">
-            <a:solidFill>
-              <a:srgbClr val="8EDBD4"/>
-            </a:solidFill>
-          </a:ln>
-          <a:effectLst/>
-        </p:spPr>
-      </p:cxnSp>
-      <p:cxnSp>
-        <p:nvCxnSpPr>
-          <p:cNvPr id="36" name="C4-E11 line 34" descr="sci-ppt:o034"/>
-          <p:cNvCxnSpPr/>
-          <p:nvPr/>
-        </p:nvCxnSpPr>
-        <p:spPr>
-          <a:xfrm flipV="1">
-            <a:off x="4169663" y="1748906"/>
-            <a:ext cx="96013" cy="16953"/>
-          </a:xfrm>
-          <a:prstGeom prst="line">
-            <a:avLst/>
-          </a:prstGeom>
-          <a:ln w="25400">
-            <a:solidFill>
-              <a:srgbClr val="8EDBD4"/>
-            </a:solidFill>
-          </a:ln>
-          <a:effectLst/>
-        </p:spPr>
-      </p:cxnSp>
-      <p:cxnSp>
-        <p:nvCxnSpPr>
-          <p:cNvPr id="37" name="C4-E11 line 35" descr="sci-ppt:o035"/>
-          <p:cNvCxnSpPr/>
-          <p:nvPr/>
-        </p:nvCxnSpPr>
-        <p:spPr>
-          <a:xfrm flipV="1">
-            <a:off x="4265676" y="1733997"/>
-            <a:ext cx="96012" cy="14909"/>
-          </a:xfrm>
-          <a:prstGeom prst="line">
-            <a:avLst/>
-          </a:prstGeom>
-          <a:ln w="25400">
-            <a:solidFill>
-              <a:srgbClr val="8EDBD4"/>
-            </a:solidFill>
-          </a:ln>
-          <a:effectLst/>
-        </p:spPr>
-      </p:cxnSp>
-      <p:cxnSp>
-        <p:nvCxnSpPr>
-          <p:cNvPr id="38" name="C4-E11 line 36" descr="sci-ppt:o036"/>
-          <p:cNvCxnSpPr/>
-          <p:nvPr/>
-        </p:nvCxnSpPr>
-        <p:spPr>
-          <a:xfrm flipV="1">
-            <a:off x="4361688" y="1721221"/>
-            <a:ext cx="96012" cy="12776"/>
-          </a:xfrm>
-          <a:prstGeom prst="line">
-            <a:avLst/>
-          </a:prstGeom>
-          <a:ln w="25400">
-            <a:solidFill>
-              <a:srgbClr val="8EDBD4"/>
-            </a:solidFill>
-          </a:ln>
-          <a:effectLst/>
-        </p:spPr>
-      </p:cxnSp>
-      <p:cxnSp>
-        <p:nvCxnSpPr>
-          <p:cNvPr id="39" name="C4-E11 line 37" descr="sci-ppt:o037"/>
-          <p:cNvCxnSpPr/>
-          <p:nvPr/>
-        </p:nvCxnSpPr>
-        <p:spPr>
-          <a:xfrm flipV="1">
-            <a:off x="4457700" y="1710660"/>
-            <a:ext cx="96012" cy="10561"/>
-          </a:xfrm>
-          <a:prstGeom prst="line">
-            <a:avLst/>
-          </a:prstGeom>
-          <a:ln w="25400">
-            <a:solidFill>
-              <a:srgbClr val="8EDBD4"/>
-            </a:solidFill>
-          </a:ln>
-          <a:effectLst/>
-        </p:spPr>
-      </p:cxnSp>
-      <p:cxnSp>
-        <p:nvCxnSpPr>
-          <p:cNvPr id="40" name="C4-E11 line 38" descr="sci-ppt:o038"/>
-          <p:cNvCxnSpPr/>
-          <p:nvPr/>
-        </p:nvCxnSpPr>
-        <p:spPr>
-          <a:xfrm flipV="1">
-            <a:off x="4553712" y="1702377"/>
-            <a:ext cx="96012" cy="8283"/>
-          </a:xfrm>
-          <a:prstGeom prst="line">
-            <a:avLst/>
-          </a:prstGeom>
-          <a:ln w="25400">
-            <a:solidFill>
-              <a:srgbClr val="8EDBD4"/>
-            </a:solidFill>
-          </a:ln>
-          <a:effectLst/>
-        </p:spPr>
-      </p:cxnSp>
-      <p:cxnSp>
-        <p:nvCxnSpPr>
-          <p:cNvPr id="41" name="C4-E11 line 39" descr="sci-ppt:o039"/>
-          <p:cNvCxnSpPr/>
-          <p:nvPr/>
-        </p:nvCxnSpPr>
-        <p:spPr>
-          <a:xfrm flipV="1">
-            <a:off x="4649724" y="1696424"/>
-            <a:ext cx="96012" cy="5953"/>
-          </a:xfrm>
-          <a:prstGeom prst="line">
-            <a:avLst/>
-          </a:prstGeom>
-          <a:ln w="25400">
-            <a:solidFill>
-              <a:srgbClr val="8EDBD4"/>
-            </a:solidFill>
-          </a:ln>
-          <a:effectLst/>
-        </p:spPr>
-      </p:cxnSp>
-      <p:cxnSp>
-        <p:nvCxnSpPr>
-          <p:cNvPr id="42" name="C4-E11 line 40" descr="sci-ppt:o040"/>
-          <p:cNvCxnSpPr/>
-          <p:nvPr/>
-        </p:nvCxnSpPr>
-        <p:spPr>
-          <a:xfrm flipV="1">
-            <a:off x="4745736" y="1692837"/>
-            <a:ext cx="96012" cy="3587"/>
-          </a:xfrm>
-          <a:prstGeom prst="line">
-            <a:avLst/>
-          </a:prstGeom>
-          <a:ln w="25400">
-            <a:solidFill>
-              <a:srgbClr val="8EDBD4"/>
-            </a:solidFill>
-          </a:ln>
-          <a:effectLst/>
-        </p:spPr>
-      </p:cxnSp>
-      <p:cxnSp>
-        <p:nvCxnSpPr>
-          <p:cNvPr id="43" name="C4-E11 line 41" descr="sci-ppt:o041"/>
-          <p:cNvCxnSpPr/>
-          <p:nvPr/>
-        </p:nvCxnSpPr>
-        <p:spPr>
-          <a:xfrm flipV="1">
-            <a:off x="4841748" y="1691640"/>
-            <a:ext cx="96012" cy="1197"/>
-          </a:xfrm>
-          <a:prstGeom prst="line">
-            <a:avLst/>
-          </a:prstGeom>
-          <a:ln w="25400">
-            <a:solidFill>
-              <a:srgbClr val="8EDBD4"/>
-            </a:solidFill>
-          </a:ln>
-          <a:effectLst/>
-        </p:spPr>
-      </p:cxnSp>
-      <p:cxnSp>
-        <p:nvCxnSpPr>
-          <p:cNvPr id="44" name="C4-E11 line 42" descr="sci-ppt:o042"/>
-          <p:cNvCxnSpPr/>
-          <p:nvPr/>
-        </p:nvCxnSpPr>
-        <p:spPr>
-          <a:xfrm>
-            <a:off x="4937760" y="1691640"/>
-            <a:ext cx="96012" cy="1197"/>
-          </a:xfrm>
-          <a:prstGeom prst="line">
-            <a:avLst/>
-          </a:prstGeom>
-          <a:ln w="25400">
-            <a:solidFill>
-              <a:srgbClr val="8EDBD4"/>
-            </a:solidFill>
-          </a:ln>
-          <a:effectLst/>
-        </p:spPr>
-      </p:cxnSp>
-      <p:cxnSp>
-        <p:nvCxnSpPr>
-          <p:cNvPr id="45" name="C4-E11 line 43" descr="sci-ppt:o043"/>
-          <p:cNvCxnSpPr/>
-          <p:nvPr/>
-        </p:nvCxnSpPr>
-        <p:spPr>
-          <a:xfrm>
-            <a:off x="5033772" y="1692837"/>
-            <a:ext cx="96012" cy="3587"/>
-          </a:xfrm>
-          <a:prstGeom prst="line">
-            <a:avLst/>
-          </a:prstGeom>
-          <a:ln w="25400">
-            <a:solidFill>
-              <a:srgbClr val="8EDBD4"/>
-            </a:solidFill>
-          </a:ln>
-          <a:effectLst/>
-        </p:spPr>
-      </p:cxnSp>
-      <p:cxnSp>
-        <p:nvCxnSpPr>
-          <p:cNvPr id="46" name="C4-E11 line 44" descr="sci-ppt:o044"/>
-          <p:cNvCxnSpPr/>
-          <p:nvPr/>
-        </p:nvCxnSpPr>
-        <p:spPr>
-          <a:xfrm>
-            <a:off x="5129784" y="1696424"/>
-            <a:ext cx="96012" cy="5953"/>
-          </a:xfrm>
-          <a:prstGeom prst="line">
-            <a:avLst/>
-          </a:prstGeom>
-          <a:ln w="25400">
-            <a:solidFill>
-              <a:srgbClr val="8EDBD4"/>
-            </a:solidFill>
-          </a:ln>
-          <a:effectLst/>
-        </p:spPr>
-      </p:cxnSp>
-      <p:cxnSp>
-        <p:nvCxnSpPr>
-          <p:cNvPr id="47" name="C4-E11 line 45" descr="sci-ppt:o045"/>
-          <p:cNvCxnSpPr/>
-          <p:nvPr/>
-        </p:nvCxnSpPr>
-        <p:spPr>
-          <a:xfrm>
-            <a:off x="5225796" y="1702377"/>
-            <a:ext cx="96012" cy="8283"/>
-          </a:xfrm>
-          <a:prstGeom prst="line">
-            <a:avLst/>
-          </a:prstGeom>
-          <a:ln w="25400">
-            <a:solidFill>
-              <a:srgbClr val="8EDBD4"/>
-            </a:solidFill>
-          </a:ln>
-          <a:effectLst/>
-        </p:spPr>
-      </p:cxnSp>
-      <p:cxnSp>
-        <p:nvCxnSpPr>
-          <p:cNvPr id="48" name="C4-E11 line 46" descr="sci-ppt:o046"/>
-          <p:cNvCxnSpPr/>
-          <p:nvPr/>
-        </p:nvCxnSpPr>
-        <p:spPr>
-          <a:xfrm>
-            <a:off x="5321808" y="1710660"/>
-            <a:ext cx="96012" cy="10561"/>
-          </a:xfrm>
-          <a:prstGeom prst="line">
-            <a:avLst/>
-          </a:prstGeom>
-          <a:ln w="25400">
-            <a:solidFill>
-              <a:srgbClr val="8EDBD4"/>
-            </a:solidFill>
-          </a:ln>
-          <a:effectLst/>
-        </p:spPr>
-      </p:cxnSp>
-      <p:cxnSp>
-        <p:nvCxnSpPr>
-          <p:cNvPr id="49" name="C4-E11 line 47" descr="sci-ppt:o047"/>
-          <p:cNvCxnSpPr/>
-          <p:nvPr/>
-        </p:nvCxnSpPr>
-        <p:spPr>
-          <a:xfrm>
-            <a:off x="5417820" y="1721221"/>
-            <a:ext cx="96012" cy="12776"/>
-          </a:xfrm>
-          <a:prstGeom prst="line">
-            <a:avLst/>
-          </a:prstGeom>
-          <a:ln w="25400">
-            <a:solidFill>
-              <a:srgbClr val="8EDBD4"/>
-            </a:solidFill>
-          </a:ln>
-          <a:effectLst/>
-        </p:spPr>
-      </p:cxnSp>
-      <p:cxnSp>
-        <p:nvCxnSpPr>
-          <p:cNvPr id="50" name="C4-E11 line 48" descr="sci-ppt:o048"/>
-          <p:cNvCxnSpPr/>
-          <p:nvPr/>
-        </p:nvCxnSpPr>
-        <p:spPr>
-          <a:xfrm>
-            <a:off x="5513832" y="1733997"/>
-            <a:ext cx="96012" cy="14909"/>
-          </a:xfrm>
-          <a:prstGeom prst="line">
-            <a:avLst/>
-          </a:prstGeom>
-          <a:ln w="25400">
-            <a:solidFill>
-              <a:srgbClr val="8EDBD4"/>
-            </a:solidFill>
-          </a:ln>
-          <a:effectLst/>
-        </p:spPr>
-      </p:cxnSp>
-      <p:cxnSp>
-        <p:nvCxnSpPr>
-          <p:cNvPr id="51" name="C4-E11 line 49" descr="sci-ppt:o049"/>
-          <p:cNvCxnSpPr/>
-          <p:nvPr/>
-        </p:nvCxnSpPr>
-        <p:spPr>
-          <a:xfrm>
-            <a:off x="5609844" y="1748906"/>
-            <a:ext cx="96012" cy="16953"/>
-          </a:xfrm>
-          <a:prstGeom prst="line">
-            <a:avLst/>
-          </a:prstGeom>
-          <a:ln w="25400">
-            <a:solidFill>
-              <a:srgbClr val="8EDBD4"/>
-            </a:solidFill>
-          </a:ln>
-          <a:effectLst/>
-        </p:spPr>
-      </p:cxnSp>
-      <p:cxnSp>
-        <p:nvCxnSpPr>
-          <p:cNvPr id="52" name="C4-E11 line 50" descr="sci-ppt:o050"/>
-          <p:cNvCxnSpPr/>
-          <p:nvPr/>
-        </p:nvCxnSpPr>
-        <p:spPr>
-          <a:xfrm>
-            <a:off x="5705856" y="1765859"/>
-            <a:ext cx="96012" cy="18892"/>
-          </a:xfrm>
-          <a:prstGeom prst="line">
-            <a:avLst/>
-          </a:prstGeom>
-          <a:ln w="25400">
-            <a:solidFill>
-              <a:srgbClr val="8EDBD4"/>
-            </a:solidFill>
-          </a:ln>
-          <a:effectLst/>
-        </p:spPr>
-      </p:cxnSp>
-      <p:cxnSp>
-        <p:nvCxnSpPr>
-          <p:cNvPr id="53" name="C4-E11 line 51" descr="sci-ppt:o051"/>
-          <p:cNvCxnSpPr/>
-          <p:nvPr/>
-        </p:nvCxnSpPr>
-        <p:spPr>
-          <a:xfrm>
-            <a:off x="5801868" y="1784751"/>
-            <a:ext cx="96012" cy="20713"/>
-          </a:xfrm>
-          <a:prstGeom prst="line">
-            <a:avLst/>
-          </a:prstGeom>
-          <a:ln w="25400">
-            <a:solidFill>
-              <a:srgbClr val="8EDBD4"/>
-            </a:solidFill>
-          </a:ln>
-          <a:effectLst/>
-        </p:spPr>
-      </p:cxnSp>
-      <p:cxnSp>
-        <p:nvCxnSpPr>
-          <p:cNvPr id="54" name="C4-E11 line 52" descr="sci-ppt:o052"/>
-          <p:cNvCxnSpPr/>
-          <p:nvPr/>
-        </p:nvCxnSpPr>
-        <p:spPr>
-          <a:xfrm>
-            <a:off x="5897880" y="1805464"/>
-            <a:ext cx="96012" cy="22407"/>
-          </a:xfrm>
-          <a:prstGeom prst="line">
-            <a:avLst/>
-          </a:prstGeom>
-          <a:ln w="25400">
-            <a:solidFill>
-              <a:srgbClr val="8EDBD4"/>
-            </a:solidFill>
-          </a:ln>
-          <a:effectLst/>
-        </p:spPr>
-      </p:cxnSp>
-      <p:cxnSp>
-        <p:nvCxnSpPr>
-          <p:cNvPr id="55" name="C4-E11 line 53" descr="sci-ppt:o053"/>
-          <p:cNvCxnSpPr/>
-          <p:nvPr/>
-        </p:nvCxnSpPr>
-        <p:spPr>
-          <a:xfrm>
-            <a:off x="5993892" y="1827871"/>
-            <a:ext cx="96012" cy="23963"/>
-          </a:xfrm>
-          <a:prstGeom prst="line">
-            <a:avLst/>
-          </a:prstGeom>
-          <a:ln w="25400">
-            <a:solidFill>
-              <a:srgbClr val="8EDBD4"/>
-            </a:solidFill>
-          </a:ln>
-          <a:effectLst/>
-        </p:spPr>
-      </p:cxnSp>
-      <p:cxnSp>
-        <p:nvCxnSpPr>
-          <p:cNvPr id="56" name="C4-E11 line 54" descr="sci-ppt:o054"/>
-          <p:cNvCxnSpPr/>
-          <p:nvPr/>
-        </p:nvCxnSpPr>
-        <p:spPr>
-          <a:xfrm>
-            <a:off x="6089904" y="1851834"/>
-            <a:ext cx="96012" cy="25372"/>
-          </a:xfrm>
-          <a:prstGeom prst="line">
-            <a:avLst/>
-          </a:prstGeom>
-          <a:ln w="25400">
-            <a:solidFill>
-              <a:srgbClr val="8EDBD4"/>
-            </a:solidFill>
-          </a:ln>
-          <a:effectLst/>
-        </p:spPr>
-      </p:cxnSp>
-      <p:cxnSp>
-        <p:nvCxnSpPr>
-          <p:cNvPr id="57" name="C4-E11 line 55" descr="sci-ppt:o055"/>
-          <p:cNvCxnSpPr/>
-          <p:nvPr/>
-        </p:nvCxnSpPr>
-        <p:spPr>
-          <a:xfrm>
-            <a:off x="6185916" y="1877206"/>
-            <a:ext cx="96012" cy="26624"/>
-          </a:xfrm>
-          <a:prstGeom prst="line">
-            <a:avLst/>
-          </a:prstGeom>
-          <a:ln w="25400">
-            <a:solidFill>
-              <a:srgbClr val="8EDBD4"/>
-            </a:solidFill>
-          </a:ln>
-          <a:effectLst/>
-        </p:spPr>
-      </p:cxnSp>
-      <p:cxnSp>
-        <p:nvCxnSpPr>
-          <p:cNvPr id="58" name="C4-E11 line 56" descr="sci-ppt:o056"/>
-          <p:cNvCxnSpPr/>
-          <p:nvPr/>
-        </p:nvCxnSpPr>
-        <p:spPr>
-          <a:xfrm>
-            <a:off x="6281928" y="1903830"/>
-            <a:ext cx="96012" cy="27711"/>
-          </a:xfrm>
-          <a:prstGeom prst="line">
-            <a:avLst/>
-          </a:prstGeom>
-          <a:ln w="25400">
-            <a:solidFill>
-              <a:srgbClr val="8EDBD4"/>
-            </a:solidFill>
-          </a:ln>
-          <a:effectLst/>
-        </p:spPr>
-      </p:cxnSp>
-      <p:cxnSp>
-        <p:nvCxnSpPr>
-          <p:cNvPr id="59" name="C4-E11 line 57" descr="sci-ppt:o057"/>
-          <p:cNvCxnSpPr/>
-          <p:nvPr/>
-        </p:nvCxnSpPr>
-        <p:spPr>
-          <a:xfrm>
-            <a:off x="6377940" y="1931541"/>
-            <a:ext cx="96012" cy="28628"/>
-          </a:xfrm>
-          <a:prstGeom prst="line">
-            <a:avLst/>
-          </a:prstGeom>
-          <a:ln w="25400">
-            <a:solidFill>
-              <a:srgbClr val="8EDBD4"/>
-            </a:solidFill>
-          </a:ln>
-          <a:effectLst/>
-        </p:spPr>
-      </p:cxnSp>
-      <p:cxnSp>
-        <p:nvCxnSpPr>
-          <p:cNvPr id="60" name="C4-E11 line 58" descr="sci-ppt:o058"/>
-          <p:cNvCxnSpPr/>
-          <p:nvPr/>
-        </p:nvCxnSpPr>
-        <p:spPr>
-          <a:xfrm>
-            <a:off x="6473952" y="1960169"/>
-            <a:ext cx="96012" cy="29369"/>
-          </a:xfrm>
-          <a:prstGeom prst="line">
-            <a:avLst/>
-          </a:prstGeom>
-          <a:ln w="25400">
-            <a:solidFill>
-              <a:srgbClr val="8EDBD4"/>
-            </a:solidFill>
-          </a:ln>
-          <a:effectLst/>
-        </p:spPr>
-      </p:cxnSp>
-      <p:cxnSp>
-        <p:nvCxnSpPr>
-          <p:cNvPr id="61" name="C4-E11 line 59" descr="sci-ppt:o059"/>
-          <p:cNvCxnSpPr/>
-          <p:nvPr/>
-        </p:nvCxnSpPr>
-        <p:spPr>
-          <a:xfrm>
-            <a:off x="6569964" y="1989538"/>
-            <a:ext cx="96012" cy="29928"/>
-          </a:xfrm>
-          <a:prstGeom prst="line">
-            <a:avLst/>
-          </a:prstGeom>
-          <a:ln w="25400">
-            <a:solidFill>
-              <a:srgbClr val="8EDBD4"/>
-            </a:solidFill>
-          </a:ln>
-          <a:effectLst/>
-        </p:spPr>
-      </p:cxnSp>
-      <p:cxnSp>
-        <p:nvCxnSpPr>
-          <p:cNvPr id="62" name="C4-E11 line 60" descr="sci-ppt:o060"/>
-          <p:cNvCxnSpPr/>
-          <p:nvPr/>
-        </p:nvCxnSpPr>
-        <p:spPr>
-          <a:xfrm>
-            <a:off x="6665976" y="2019466"/>
-            <a:ext cx="96012" cy="30303"/>
-          </a:xfrm>
-          <a:prstGeom prst="line">
-            <a:avLst/>
-          </a:prstGeom>
-          <a:ln w="25400">
-            <a:solidFill>
-              <a:srgbClr val="8EDBD4"/>
-            </a:solidFill>
-          </a:ln>
-          <a:effectLst/>
-        </p:spPr>
-      </p:cxnSp>
-      <p:cxnSp>
-        <p:nvCxnSpPr>
-          <p:cNvPr id="63" name="C4-E11 line 61" descr="sci-ppt:o061"/>
-          <p:cNvCxnSpPr/>
-          <p:nvPr/>
-        </p:nvCxnSpPr>
-        <p:spPr>
-          <a:xfrm>
-            <a:off x="6761988" y="2049769"/>
-            <a:ext cx="96012" cy="30491"/>
-          </a:xfrm>
-          <a:prstGeom prst="line">
-            <a:avLst/>
-          </a:prstGeom>
-          <a:ln w="25400">
-            <a:solidFill>
-              <a:srgbClr val="8EDBD4"/>
-            </a:solidFill>
-          </a:ln>
-          <a:effectLst/>
-        </p:spPr>
-      </p:cxnSp>
-      <p:cxnSp>
-        <p:nvCxnSpPr>
-          <p:cNvPr id="64" name="C4-E11 line 62" descr="sci-ppt:o062"/>
-          <p:cNvCxnSpPr/>
-          <p:nvPr/>
-        </p:nvCxnSpPr>
-        <p:spPr>
-          <a:xfrm>
-            <a:off x="6858000" y="2080260"/>
-            <a:ext cx="96012" cy="30490"/>
-          </a:xfrm>
-          <a:prstGeom prst="line">
-            <a:avLst/>
-          </a:prstGeom>
-          <a:ln w="25400">
-            <a:solidFill>
-              <a:srgbClr val="8EDBD4"/>
-            </a:solidFill>
-          </a:ln>
-          <a:effectLst/>
-        </p:spPr>
-      </p:cxnSp>
-      <p:cxnSp>
-        <p:nvCxnSpPr>
-          <p:cNvPr id="65" name="C4-E11 line 63" descr="sci-ppt:o063"/>
-          <p:cNvCxnSpPr/>
-          <p:nvPr/>
-        </p:nvCxnSpPr>
-        <p:spPr>
-          <a:xfrm>
-            <a:off x="6954012" y="2110750"/>
-            <a:ext cx="96012" cy="30303"/>
-          </a:xfrm>
-          <a:prstGeom prst="line">
-            <a:avLst/>
-          </a:prstGeom>
-          <a:ln w="25400">
-            <a:solidFill>
-              <a:srgbClr val="8EDBD4"/>
-            </a:solidFill>
-          </a:ln>
-          <a:effectLst/>
-        </p:spPr>
-      </p:cxnSp>
-      <p:cxnSp>
-        <p:nvCxnSpPr>
-          <p:cNvPr id="66" name="C4-E11 line 64" descr="sci-ppt:o064"/>
-          <p:cNvCxnSpPr/>
-          <p:nvPr/>
-        </p:nvCxnSpPr>
-        <p:spPr>
-          <a:xfrm>
-            <a:off x="7050024" y="2141053"/>
-            <a:ext cx="96012" cy="29928"/>
-          </a:xfrm>
-          <a:prstGeom prst="line">
-            <a:avLst/>
-          </a:prstGeom>
-          <a:ln w="25400">
-            <a:solidFill>
-              <a:srgbClr val="8EDBD4"/>
-            </a:solidFill>
-          </a:ln>
-          <a:effectLst/>
-        </p:spPr>
-      </p:cxnSp>
-      <p:cxnSp>
-        <p:nvCxnSpPr>
-          <p:cNvPr id="67" name="C4-E11 line 65" descr="sci-ppt:o065"/>
-          <p:cNvCxnSpPr/>
-          <p:nvPr/>
-        </p:nvCxnSpPr>
-        <p:spPr>
-          <a:xfrm>
-            <a:off x="7146036" y="2170981"/>
-            <a:ext cx="96012" cy="29369"/>
-          </a:xfrm>
-          <a:prstGeom prst="line">
-            <a:avLst/>
-          </a:prstGeom>
-          <a:ln w="25400">
-            <a:solidFill>
-              <a:srgbClr val="8EDBD4"/>
-            </a:solidFill>
-          </a:ln>
-          <a:effectLst/>
-        </p:spPr>
-      </p:cxnSp>
-      <p:cxnSp>
-        <p:nvCxnSpPr>
-          <p:cNvPr id="68" name="C4-E11 line 66" descr="sci-ppt:o066"/>
-          <p:cNvCxnSpPr/>
-          <p:nvPr/>
-        </p:nvCxnSpPr>
-        <p:spPr>
-          <a:xfrm>
-            <a:off x="7242048" y="2200350"/>
-            <a:ext cx="96012" cy="28628"/>
-          </a:xfrm>
-          <a:prstGeom prst="line">
-            <a:avLst/>
-          </a:prstGeom>
-          <a:ln w="25400">
-            <a:solidFill>
-              <a:srgbClr val="8EDBD4"/>
-            </a:solidFill>
-          </a:ln>
-          <a:effectLst/>
-        </p:spPr>
-      </p:cxnSp>
-      <p:cxnSp>
-        <p:nvCxnSpPr>
-          <p:cNvPr id="69" name="C4-E11 line 67" descr="sci-ppt:o067"/>
-          <p:cNvCxnSpPr/>
-          <p:nvPr/>
-        </p:nvCxnSpPr>
-        <p:spPr>
-          <a:xfrm>
-            <a:off x="7338060" y="2228978"/>
-            <a:ext cx="96011" cy="27711"/>
-          </a:xfrm>
-          <a:prstGeom prst="line">
-            <a:avLst/>
-          </a:prstGeom>
-          <a:ln w="25400">
-            <a:solidFill>
-              <a:srgbClr val="8EDBD4"/>
-            </a:solidFill>
-          </a:ln>
-          <a:effectLst/>
-        </p:spPr>
-      </p:cxnSp>
-      <p:cxnSp>
-        <p:nvCxnSpPr>
-          <p:cNvPr id="70" name="C4-E11 line 68" descr="sci-ppt:o068"/>
-          <p:cNvCxnSpPr/>
-          <p:nvPr/>
-        </p:nvCxnSpPr>
-        <p:spPr>
-          <a:xfrm>
-            <a:off x="7434071" y="2256689"/>
-            <a:ext cx="96012" cy="26624"/>
-          </a:xfrm>
-          <a:prstGeom prst="line">
-            <a:avLst/>
-          </a:prstGeom>
-          <a:ln w="25400">
-            <a:solidFill>
-              <a:srgbClr val="8EDBD4"/>
-            </a:solidFill>
-          </a:ln>
-          <a:effectLst/>
-        </p:spPr>
-      </p:cxnSp>
-      <p:cxnSp>
-        <p:nvCxnSpPr>
-          <p:cNvPr id="71" name="C4-E11 line 69" descr="sci-ppt:o069"/>
-          <p:cNvCxnSpPr/>
-          <p:nvPr/>
-        </p:nvCxnSpPr>
-        <p:spPr>
-          <a:xfrm>
-            <a:off x="7530083" y="2283313"/>
-            <a:ext cx="96013" cy="25372"/>
-          </a:xfrm>
-          <a:prstGeom prst="line">
-            <a:avLst/>
-          </a:prstGeom>
-          <a:ln w="25400">
-            <a:solidFill>
-              <a:srgbClr val="8EDBD4"/>
-            </a:solidFill>
-          </a:ln>
-          <a:effectLst/>
-        </p:spPr>
-      </p:cxnSp>
-      <p:cxnSp>
-        <p:nvCxnSpPr>
-          <p:cNvPr id="72" name="C4-E11 line 70" descr="sci-ppt:o070"/>
-          <p:cNvCxnSpPr/>
-          <p:nvPr/>
-        </p:nvCxnSpPr>
-        <p:spPr>
-          <a:xfrm>
-            <a:off x="7626096" y="2308685"/>
-            <a:ext cx="96012" cy="23963"/>
-          </a:xfrm>
-          <a:prstGeom prst="line">
-            <a:avLst/>
-          </a:prstGeom>
-          <a:ln w="25400">
-            <a:solidFill>
-              <a:srgbClr val="8EDBD4"/>
-            </a:solidFill>
-          </a:ln>
-          <a:effectLst/>
-        </p:spPr>
-      </p:cxnSp>
-      <p:cxnSp>
-        <p:nvCxnSpPr>
-          <p:cNvPr id="73" name="C4-E11 line 71" descr="sci-ppt:o071"/>
-          <p:cNvCxnSpPr/>
-          <p:nvPr/>
-        </p:nvCxnSpPr>
-        <p:spPr>
-          <a:xfrm>
-            <a:off x="7722108" y="2332648"/>
-            <a:ext cx="96011" cy="22407"/>
-          </a:xfrm>
-          <a:prstGeom prst="line">
-            <a:avLst/>
-          </a:prstGeom>
-          <a:ln w="25400">
-            <a:solidFill>
-              <a:srgbClr val="8EDBD4"/>
-            </a:solidFill>
-          </a:ln>
-          <a:effectLst/>
-        </p:spPr>
-      </p:cxnSp>
-      <p:cxnSp>
-        <p:nvCxnSpPr>
-          <p:cNvPr id="74" name="C4-E11 line 72" descr="sci-ppt:o072"/>
-          <p:cNvCxnSpPr/>
-          <p:nvPr/>
-        </p:nvCxnSpPr>
-        <p:spPr>
-          <a:xfrm>
-            <a:off x="7818119" y="2355055"/>
-            <a:ext cx="96012" cy="20713"/>
-          </a:xfrm>
-          <a:prstGeom prst="line">
-            <a:avLst/>
-          </a:prstGeom>
-          <a:ln w="25400">
-            <a:solidFill>
-              <a:srgbClr val="8EDBD4"/>
-            </a:solidFill>
-          </a:ln>
-          <a:effectLst/>
-        </p:spPr>
-      </p:cxnSp>
-      <p:cxnSp>
-        <p:nvCxnSpPr>
-          <p:cNvPr id="75" name="C4-E11 line 73" descr="sci-ppt:o073"/>
-          <p:cNvCxnSpPr/>
-          <p:nvPr/>
-        </p:nvCxnSpPr>
-        <p:spPr>
-          <a:xfrm>
-            <a:off x="7914131" y="2375768"/>
-            <a:ext cx="96013" cy="18892"/>
-          </a:xfrm>
-          <a:prstGeom prst="line">
-            <a:avLst/>
-          </a:prstGeom>
-          <a:ln w="25400">
-            <a:solidFill>
-              <a:srgbClr val="8EDBD4"/>
-            </a:solidFill>
-          </a:ln>
-          <a:effectLst/>
-        </p:spPr>
-      </p:cxnSp>
-      <p:cxnSp>
-        <p:nvCxnSpPr>
-          <p:cNvPr id="76" name="C4-E11 line 74" descr="sci-ppt:o074"/>
-          <p:cNvCxnSpPr/>
-          <p:nvPr/>
-        </p:nvCxnSpPr>
-        <p:spPr>
-          <a:xfrm>
-            <a:off x="8010144" y="2394660"/>
-            <a:ext cx="96012" cy="16953"/>
-          </a:xfrm>
-          <a:prstGeom prst="line">
-            <a:avLst/>
-          </a:prstGeom>
-          <a:ln w="25400">
-            <a:solidFill>
-              <a:srgbClr val="8EDBD4"/>
-            </a:solidFill>
-          </a:ln>
-          <a:effectLst/>
-        </p:spPr>
-      </p:cxnSp>
-      <p:cxnSp>
-        <p:nvCxnSpPr>
-          <p:cNvPr id="77" name="C4-E11 line 75" descr="sci-ppt:o075"/>
-          <p:cNvCxnSpPr/>
-          <p:nvPr/>
-        </p:nvCxnSpPr>
-        <p:spPr>
-          <a:xfrm>
-            <a:off x="8106156" y="2411613"/>
-            <a:ext cx="96011" cy="14909"/>
-          </a:xfrm>
-          <a:prstGeom prst="line">
-            <a:avLst/>
-          </a:prstGeom>
-          <a:ln w="25400">
-            <a:solidFill>
-              <a:srgbClr val="8EDBD4"/>
-            </a:solidFill>
-          </a:ln>
-          <a:effectLst/>
-        </p:spPr>
-      </p:cxnSp>
-      <p:cxnSp>
-        <p:nvCxnSpPr>
-          <p:cNvPr id="78" name="C4-E11 line 76" descr="sci-ppt:o076"/>
-          <p:cNvCxnSpPr/>
-          <p:nvPr/>
-        </p:nvCxnSpPr>
-        <p:spPr>
-          <a:xfrm>
-            <a:off x="8202167" y="2426522"/>
-            <a:ext cx="96012" cy="12776"/>
-          </a:xfrm>
-          <a:prstGeom prst="line">
-            <a:avLst/>
-          </a:prstGeom>
-          <a:ln w="25400">
-            <a:solidFill>
-              <a:srgbClr val="8EDBD4"/>
-            </a:solidFill>
-          </a:ln>
-          <a:effectLst/>
-        </p:spPr>
-      </p:cxnSp>
-      <p:cxnSp>
-        <p:nvCxnSpPr>
-          <p:cNvPr id="79" name="C4-E11 line 77" descr="sci-ppt:o077"/>
-          <p:cNvCxnSpPr/>
-          <p:nvPr/>
-        </p:nvCxnSpPr>
-        <p:spPr>
-          <a:xfrm>
-            <a:off x="8298179" y="2439298"/>
-            <a:ext cx="96013" cy="10561"/>
-          </a:xfrm>
-          <a:prstGeom prst="line">
-            <a:avLst/>
-          </a:prstGeom>
-          <a:ln w="25400">
-            <a:solidFill>
-              <a:srgbClr val="8EDBD4"/>
-            </a:solidFill>
-          </a:ln>
-          <a:effectLst/>
-        </p:spPr>
-      </p:cxnSp>
-      <p:cxnSp>
-        <p:nvCxnSpPr>
-          <p:cNvPr id="80" name="C4-E11 line 78" descr="sci-ppt:o078"/>
-          <p:cNvCxnSpPr/>
-          <p:nvPr/>
-        </p:nvCxnSpPr>
-        <p:spPr>
-          <a:xfrm>
-            <a:off x="8394192" y="2449859"/>
-            <a:ext cx="96011" cy="8283"/>
-          </a:xfrm>
-          <a:prstGeom prst="line">
-            <a:avLst/>
-          </a:prstGeom>
-          <a:ln w="25400">
-            <a:solidFill>
-              <a:srgbClr val="8EDBD4"/>
-            </a:solidFill>
-          </a:ln>
-          <a:effectLst/>
-        </p:spPr>
-      </p:cxnSp>
-      <p:cxnSp>
-        <p:nvCxnSpPr>
-          <p:cNvPr id="81" name="C4-E11 line 79" descr="sci-ppt:o079"/>
-          <p:cNvCxnSpPr/>
-          <p:nvPr/>
-        </p:nvCxnSpPr>
-        <p:spPr>
-          <a:xfrm>
-            <a:off x="8490203" y="2458142"/>
-            <a:ext cx="96012" cy="5953"/>
-          </a:xfrm>
-          <a:prstGeom prst="line">
-            <a:avLst/>
-          </a:prstGeom>
-          <a:ln w="25400">
-            <a:solidFill>
-              <a:srgbClr val="8EDBD4"/>
-            </a:solidFill>
-          </a:ln>
-          <a:effectLst/>
-        </p:spPr>
-      </p:cxnSp>
-      <p:cxnSp>
-        <p:nvCxnSpPr>
-          <p:cNvPr id="82" name="C4-E11 line 80" descr="sci-ppt:o080"/>
-          <p:cNvCxnSpPr/>
-          <p:nvPr/>
-        </p:nvCxnSpPr>
-        <p:spPr>
-          <a:xfrm>
-            <a:off x="8586215" y="2464095"/>
-            <a:ext cx="96013" cy="3587"/>
-          </a:xfrm>
-          <a:prstGeom prst="line">
-            <a:avLst/>
-          </a:prstGeom>
-          <a:ln w="25400">
-            <a:solidFill>
-              <a:srgbClr val="8EDBD4"/>
-            </a:solidFill>
-          </a:ln>
-          <a:effectLst/>
-        </p:spPr>
-      </p:cxnSp>
-      <p:cxnSp>
-        <p:nvCxnSpPr>
-          <p:cNvPr id="83" name="C4-E11 line 81" descr="sci-ppt:o081"/>
-          <p:cNvCxnSpPr/>
-          <p:nvPr/>
-        </p:nvCxnSpPr>
-        <p:spPr>
-          <a:xfrm>
-            <a:off x="8682228" y="2467682"/>
-            <a:ext cx="96012" cy="1198"/>
-          </a:xfrm>
-          <a:prstGeom prst="line">
-            <a:avLst/>
-          </a:prstGeom>
-          <a:ln w="25400">
-            <a:solidFill>
-              <a:srgbClr val="8EDBD4"/>
-            </a:solidFill>
-          </a:ln>
-          <a:effectLst/>
-        </p:spPr>
-      </p:cxnSp>
-      <p:sp>
-        <p:nvSpPr>
-          <p:cNvPr id="84" name="C4-E11 rect 82" descr="sci-ppt:o082"/>
-          <p:cNvSpPr/>
-          <p:nvPr/>
-        </p:nvSpPr>
-        <p:spPr>
-          <a:xfrm>
-            <a:off x="868680" y="2194560"/>
-            <a:ext cx="274320" cy="548640"/>
-          </a:xfrm>
-          <a:prstGeom prst="rect">
-            <a:avLst/>
-          </a:prstGeom>
-          <a:solidFill>
-            <a:srgbClr val="213E4B"/>
-          </a:solidFill>
-          <a:ln w="19050">
-            <a:solidFill>
-              <a:srgbClr val="B4C7D2"/>
-            </a:solidFill>
-          </a:ln>
-          <a:effectLst/>
-        </p:spPr>
-        <p:txBody>
-          <a:bodyPr rtlCol="0" anchor="ctr"/>
-          <a:lstStyle/>
-          <a:p>
-            <a:pPr algn="ctr"/>
-          </a:p>
-        </p:txBody>
-      </p:sp>
-      <p:sp>
-        <p:nvSpPr>
-          <p:cNvPr id="85" name="C4-E11 rect 83" descr="sci-ppt:o083"/>
-          <p:cNvSpPr/>
-          <p:nvPr/>
-        </p:nvSpPr>
-        <p:spPr>
-          <a:xfrm>
-            <a:off x="8732520" y="2194560"/>
-            <a:ext cx="274320" cy="548640"/>
-          </a:xfrm>
-          <a:prstGeom prst="rect">
-            <a:avLst/>
-          </a:prstGeom>
-          <a:solidFill>
-            <a:srgbClr val="213E4B"/>
-          </a:solidFill>
-          <a:ln w="19050">
-            <a:solidFill>
-              <a:srgbClr val="B4C7D2"/>
-            </a:solidFill>
-          </a:ln>
-          <a:effectLst/>
-        </p:spPr>
-        <p:txBody>
-          <a:bodyPr rtlCol="0" anchor="ctr"/>
-          <a:lstStyle/>
-          <a:p>
-            <a:pPr algn="ctr"/>
-          </a:p>
-        </p:txBody>
-      </p:sp>
-      <p:cxnSp>
-        <p:nvCxnSpPr>
-          <p:cNvPr id="86" name="C4-E11 arrow 84" descr="sci-ppt:o084"/>
-          <p:cNvCxnSpPr/>
-          <p:nvPr/>
-        </p:nvCxnSpPr>
-        <p:spPr>
-          <a:xfrm flipV="1">
-            <a:off x="2743200" y="2606040"/>
-            <a:ext cx="0" cy="822960"/>
-          </a:xfrm>
-          <a:prstGeom prst="line">
-            <a:avLst/>
-          </a:prstGeom>
-          <a:ln w="25400">
-            <a:solidFill>
-              <a:srgbClr val="8EDBD4"/>
-            </a:solidFill>
-            <a:headEnd type="none" w="med" len="med"/>
-            <a:tailEnd type="triangle" w="med" len="med"/>
-          </a:ln>
-          <a:effectLst/>
-        </p:spPr>
-      </p:cxnSp>
-      <p:cxnSp>
-        <p:nvCxnSpPr>
-          <p:cNvPr id="87" name="C4-E11 arrow 85" descr="sci-ppt:o085"/>
-          <p:cNvCxnSpPr/>
-          <p:nvPr/>
-        </p:nvCxnSpPr>
-        <p:spPr>
-          <a:xfrm flipV="1">
-            <a:off x="4937760" y="2606040"/>
-            <a:ext cx="0" cy="822960"/>
-          </a:xfrm>
-          <a:prstGeom prst="line">
-            <a:avLst/>
-          </a:prstGeom>
-          <a:ln w="25400">
-            <a:solidFill>
-              <a:srgbClr val="8EDBD4"/>
-            </a:solidFill>
-            <a:headEnd type="none" w="med" len="med"/>
-            <a:tailEnd type="triangle" w="med" len="med"/>
-          </a:ln>
-          <a:effectLst/>
-        </p:spPr>
-      </p:cxnSp>
-      <p:cxnSp>
-        <p:nvCxnSpPr>
-          <p:cNvPr id="88" name="C4-E11 arrow 86" descr="sci-ppt:o086"/>
-          <p:cNvCxnSpPr/>
-          <p:nvPr/>
-        </p:nvCxnSpPr>
-        <p:spPr>
-          <a:xfrm flipV="1">
-            <a:off x="7132320" y="2606040"/>
-            <a:ext cx="0" cy="822960"/>
-          </a:xfrm>
-          <a:prstGeom prst="line">
-            <a:avLst/>
-          </a:prstGeom>
-          <a:ln w="25400">
-            <a:solidFill>
-              <a:srgbClr val="8EDBD4"/>
-            </a:solidFill>
-            <a:headEnd type="none" w="med" len="med"/>
-            <a:tailEnd type="triangle" w="med" len="med"/>
-          </a:ln>
-          <a:effectLst/>
-        </p:spPr>
-      </p:cxnSp>
-      <p:cxnSp>
-        <p:nvCxnSpPr>
-          <p:cNvPr id="89" name="C4-E11 arrow 87" descr="sci-ppt:o087"/>
-          <p:cNvCxnSpPr/>
-          <p:nvPr/>
-        </p:nvCxnSpPr>
-        <p:spPr>
-          <a:xfrm>
-            <a:off x="4937760" y="914400"/>
-            <a:ext cx="0" cy="594360"/>
-          </a:xfrm>
-          <a:prstGeom prst="line">
-            <a:avLst/>
-          </a:prstGeom>
-          <a:ln w="25400">
-            <a:solidFill>
-              <a:srgbClr val="8EDBD4"/>
-            </a:solidFill>
-            <a:headEnd type="none" w="med" len="med"/>
-            <a:tailEnd type="triangle" w="med" len="med"/>
-          </a:ln>
-          <a:effectLst/>
-        </p:spPr>
-      </p:cxnSp>
-      <p:sp>
-        <p:nvSpPr>
-          <p:cNvPr id="90" name="C4-E11 text 88" descr="sci-ppt:o088"/>
+      <p:sp>
+        <p:nvSpPr>
+          <p:cNvPr id="34" name="C4-E11 text 32" descr="sci-ppt:o032"/>
           <p:cNvSpPr txBox="1"/>
           <p:nvPr/>
         </p:nvSpPr>
         <p:spPr>
           <a:xfrm>
-            <a:off x="5486400" y="960120"/>
-            <a:ext cx="5486400" cy="411480"/>
+            <a:off x="7028078" y="3474719"/>
+            <a:ext cx="1463040" cy="231648"/>
           </a:xfrm>
           <a:prstGeom prst="rect">
             <a:avLst/>
@@ -5096,7 +4158,7 @@
           <a:effectLst/>
         </p:spPr>
         <p:txBody>
-          <a:bodyPr wrap="square" lIns="27432" rIns="27432" tIns="18288" bIns="18288" anchor="ctr">
+          <a:bodyPr wrap="none" lIns="18288" rIns="18288" tIns="18288" bIns="18288" anchor="t">
             <a:spAutoFit/>
           </a:bodyPr>
           <a:lstStyle/>
@@ -5107,27 +4169,163 @@
               </a:spcAft>
             </a:pPr>
             <a:r>
-              <a:rPr sz="1800" b="0" i="0">
+              <a:rPr sz="1200" b="0" i="0">
+                <a:solidFill>
+                  <a:srgbClr val="B4C7D2"/>
+                </a:solidFill>
+                <a:latin typeface="Arial"/>
+              </a:rPr>
+              <a:t>stays shut</a:t>
+            </a:r>
+          </a:p>
+        </p:txBody>
+      </p:sp>
+      <p:sp>
+        <p:nvSpPr>
+          <p:cNvPr id="35" name="C4-E11 text 33" descr="sci-ppt:o033"/>
+          <p:cNvSpPr txBox="1"/>
+          <p:nvPr/>
+        </p:nvSpPr>
+        <p:spPr>
+          <a:xfrm>
+            <a:off x="9160459" y="3200399"/>
+            <a:ext cx="1280160" cy="231648"/>
+          </a:xfrm>
+          <a:prstGeom prst="rect">
+            <a:avLst/>
+          </a:prstGeom>
+          <a:noFill/>
+          <a:effectLst/>
+        </p:spPr>
+        <p:txBody>
+          <a:bodyPr wrap="none" lIns="18288" rIns="18288" tIns="18288" bIns="18288" anchor="t">
+            <a:spAutoFit/>
+          </a:bodyPr>
+          <a:lstStyle/>
+          <a:p>
+            <a:pPr algn="l">
+              <a:spcAft>
+                <a:spcPts val="0"/>
+              </a:spcAft>
+            </a:pPr>
+            <a:r>
+              <a:rPr sz="1200" b="0" i="0">
+                <a:solidFill>
+                  <a:srgbClr val="8EDBD4"/>
+                </a:solidFill>
+                <a:latin typeface="Arial"/>
+              </a:rPr>
+              <a:t>advances</a:t>
+            </a:r>
+          </a:p>
+        </p:txBody>
+      </p:sp>
+      <p:sp>
+        <p:nvSpPr>
+          <p:cNvPr id="36" name="C4-E11 text 34" descr="sci-ppt:o034"/>
+          <p:cNvSpPr txBox="1"/>
+          <p:nvPr/>
+        </p:nvSpPr>
+        <p:spPr>
+          <a:xfrm>
+            <a:off x="8887968" y="1499615"/>
+            <a:ext cx="914400" cy="231648"/>
+          </a:xfrm>
+          <a:prstGeom prst="rect">
+            <a:avLst/>
+          </a:prstGeom>
+          <a:noFill/>
+          <a:effectLst/>
+        </p:spPr>
+        <p:txBody>
+          <a:bodyPr wrap="none" lIns="18288" rIns="18288" tIns="18288" bIns="18288" anchor="t">
+            <a:spAutoFit/>
+          </a:bodyPr>
+          <a:lstStyle/>
+          <a:p>
+            <a:pPr algn="l">
+              <a:spcAft>
+                <a:spcPts val="0"/>
+              </a:spcAft>
+            </a:pPr>
+            <a:r>
+              <a:rPr sz="1200" b="0" i="0">
+                <a:solidFill>
+                  <a:srgbClr val="F2B880"/>
+                </a:solidFill>
+                <a:latin typeface="Arial"/>
+              </a:rPr>
+              <a:t>G = Γ</a:t>
+            </a:r>
+          </a:p>
+        </p:txBody>
+      </p:sp>
+      <p:sp>
+        <p:nvSpPr>
+          <p:cNvPr id="37" name="C4-E11 text 35" descr="sci-ppt:o035"/>
+          <p:cNvSpPr txBox="1"/>
+          <p:nvPr/>
+        </p:nvSpPr>
+        <p:spPr>
+          <a:xfrm>
+            <a:off x="6858000" y="5486400"/>
+            <a:ext cx="4937760" cy="417576"/>
+          </a:xfrm>
+          <a:prstGeom prst="rect">
+            <a:avLst/>
+          </a:prstGeom>
+          <a:noFill/>
+          <a:effectLst/>
+        </p:spPr>
+        <p:txBody>
+          <a:bodyPr wrap="none" lIns="18288" rIns="18288" tIns="18288" bIns="18288" anchor="t">
+            <a:spAutoFit/>
+          </a:bodyPr>
+          <a:lstStyle/>
+          <a:p>
+            <a:pPr algn="l">
+              <a:spcAft>
+                <a:spcPts val="0"/>
+              </a:spcAft>
+            </a:pPr>
+            <a:r>
+              <a:rPr sz="1200" b="0" i="0">
                 <a:solidFill>
                   <a:srgbClr val="E7F0F3"/>
                 </a:solidFill>
                 <a:latin typeface="Arial"/>
               </a:rPr>
-              <a:t>t_coh ↓: opening resistance</a:t>
-            </a:r>
-          </a:p>
-        </p:txBody>
-      </p:sp>
-      <p:sp>
-        <p:nvSpPr>
-          <p:cNvPr id="91" name="C4-E11 text 89" descr="sci-ppt:o089"/>
+              <a:t>Quasistatic criterion: needs G computed with the correct load</a:t>
+            </a:r>
+          </a:p>
+          <a:p>
+            <a:pPr algn="l">
+              <a:spcAft>
+                <a:spcPts val="0"/>
+              </a:spcAft>
+            </a:pPr>
+            <a:r>
+              <a:rPr sz="1200" b="0" i="0">
+                <a:solidFill>
+                  <a:srgbClr val="E7F0F3"/>
+                </a:solidFill>
+                <a:latin typeface="Arial"/>
+              </a:rPr>
+              <a:t>path.</a:t>
+            </a:r>
+          </a:p>
+        </p:txBody>
+      </p:sp>
+      <p:sp>
+        <p:nvSpPr>
+          <p:cNvPr id="38" name="C4-E11 text 36" descr="sci-ppt:o036"/>
           <p:cNvSpPr txBox="1"/>
           <p:nvPr/>
         </p:nvSpPr>
         <p:spPr>
           <a:xfrm>
-            <a:off x="2194560" y="3474720"/>
-            <a:ext cx="6400800" cy="320040"/>
+            <a:off x="320040" y="6510528"/>
+            <a:ext cx="11521440" cy="200660"/>
           </a:xfrm>
           <a:prstGeom prst="rect">
             <a:avLst/>
@@ -5136,421 +4334,7 @@
           <a:effectLst/>
         </p:spPr>
         <p:txBody>
-          <a:bodyPr wrap="square" lIns="27432" rIns="27432" tIns="18288" bIns="18288" anchor="ctr">
-            <a:spAutoFit/>
-          </a:bodyPr>
-          <a:lstStyle/>
-          <a:p>
-            <a:pPr algn="l">
-              <a:spcAft>
-                <a:spcPts val="0"/>
-              </a:spcAft>
-            </a:pPr>
-            <a:r>
-              <a:rPr sz="1700" b="0" i="0">
-                <a:solidFill>
-                  <a:srgbClr val="E7F0F3"/>
-                </a:solidFill>
-                <a:latin typeface="Arial"/>
-              </a:rPr>
-              <a:t>p_load ↑: applied positive departure load</a:t>
-            </a:r>
-          </a:p>
-        </p:txBody>
-      </p:sp>
-      <p:sp>
-        <p:nvSpPr>
-          <p:cNvPr id="92" name="C4-E11 text 90" descr="sci-ppt:o090"/>
-          <p:cNvSpPr txBox="1"/>
-          <p:nvPr/>
-        </p:nvSpPr>
-        <p:spPr>
-          <a:xfrm>
-            <a:off x="914400" y="731520"/>
-            <a:ext cx="3657600" cy="365760"/>
-          </a:xfrm>
-          <a:prstGeom prst="rect">
-            <a:avLst/>
-          </a:prstGeom>
-          <a:noFill/>
-          <a:effectLst/>
-        </p:spPr>
-        <p:txBody>
-          <a:bodyPr wrap="square" lIns="27432" rIns="27432" tIns="18288" bIns="18288" anchor="ctr">
-            <a:spAutoFit/>
-          </a:bodyPr>
-          <a:lstStyle/>
-          <a:p>
-            <a:pPr algn="l">
-              <a:spcAft>
-                <a:spcPts val="0"/>
-              </a:spcAft>
-            </a:pPr>
-            <a:r>
-              <a:rPr sz="1800" b="0" i="0">
-                <a:solidFill>
-                  <a:srgbClr val="E7F0F3"/>
-                </a:solidFill>
-                <a:latin typeface="Arial"/>
-              </a:rPr>
-              <a:t>Film: w ↑; fixed clamps</a:t>
-            </a:r>
-          </a:p>
-        </p:txBody>
-      </p:sp>
-      <p:sp>
-        <p:nvSpPr>
-          <p:cNvPr id="93" name="C4-E11 text 91" descr="sci-ppt:o091"/>
-          <p:cNvSpPr txBox="1"/>
-          <p:nvPr/>
-        </p:nvSpPr>
-        <p:spPr>
-          <a:xfrm>
-            <a:off x="9326880" y="1920240"/>
-            <a:ext cx="2468880" cy="822960"/>
-          </a:xfrm>
-          <a:prstGeom prst="rect">
-            <a:avLst/>
-          </a:prstGeom>
-          <a:noFill/>
-          <a:effectLst/>
-        </p:spPr>
-        <p:txBody>
-          <a:bodyPr wrap="square" lIns="27432" rIns="27432" tIns="18288" bIns="18288" anchor="ctr">
-            <a:spAutoFit/>
-          </a:bodyPr>
-          <a:lstStyle/>
-          <a:p>
-            <a:pPr algn="l">
-              <a:spcAft>
-                <a:spcPts val="0"/>
-              </a:spcAft>
-            </a:pPr>
-            <a:r>
-              <a:rPr sz="1700" b="0" i="0">
-                <a:solidFill>
-                  <a:srgbClr val="8EDBD4"/>
-                </a:solidFill>
-                <a:latin typeface="Arial"/>
-              </a:rPr>
-              <a:t>Inertia</a:t>
-            </a:r>
-          </a:p>
-          <a:p>
-            <a:pPr algn="l">
-              <a:spcAft>
-                <a:spcPts val="0"/>
-              </a:spcAft>
-            </a:pPr>
-            <a:r>
-              <a:rPr sz="1700" b="0" i="0">
-                <a:solidFill>
-                  <a:srgbClr val="8EDBD4"/>
-                </a:solidFill>
-                <a:latin typeface="Arial"/>
-              </a:rPr>
-              <a:t>Bending</a:t>
-            </a:r>
-          </a:p>
-          <a:p>
-            <a:pPr algn="l">
-              <a:spcAft>
-                <a:spcPts val="0"/>
-              </a:spcAft>
-            </a:pPr>
-            <a:r>
-              <a:rPr sz="1700" b="0" i="0">
-                <a:solidFill>
-                  <a:srgbClr val="8EDBD4"/>
-                </a:solidFill>
-                <a:latin typeface="Arial"/>
-              </a:rPr>
-              <a:t>Pretension</a:t>
-            </a:r>
-          </a:p>
-        </p:txBody>
-      </p:sp>
-      <p:cxnSp>
-        <p:nvCxnSpPr>
-          <p:cNvPr id="94" name="C4-E11 line 92" descr="sci-ppt:o092"/>
-          <p:cNvCxnSpPr/>
-          <p:nvPr/>
-        </p:nvCxnSpPr>
-        <p:spPr>
-          <a:xfrm>
-            <a:off x="274320" y="3977639"/>
-            <a:ext cx="11612880" cy="0"/>
-          </a:xfrm>
-          <a:prstGeom prst="line">
-            <a:avLst/>
-          </a:prstGeom>
-          <a:ln w="12700">
-            <a:solidFill>
-              <a:srgbClr val="405967"/>
-            </a:solidFill>
-          </a:ln>
-          <a:effectLst/>
-        </p:spPr>
-      </p:cxnSp>
-      <p:sp>
-        <p:nvSpPr>
-          <p:cNvPr id="95" name="C4-E11 text 93" descr="sci-ppt:o093"/>
-          <p:cNvSpPr txBox="1"/>
-          <p:nvPr/>
-        </p:nvSpPr>
-        <p:spPr>
-          <a:xfrm>
-            <a:off x="320040" y="4096512"/>
-            <a:ext cx="5715000" cy="246888"/>
-          </a:xfrm>
-          <a:prstGeom prst="rect">
-            <a:avLst/>
-          </a:prstGeom>
-          <a:noFill/>
-          <a:effectLst/>
-        </p:spPr>
-        <p:txBody>
-          <a:bodyPr wrap="square" lIns="27432" rIns="27432" tIns="18288" bIns="18288" anchor="ctr">
-            <a:spAutoFit/>
-          </a:bodyPr>
-          <a:lstStyle/>
-          <a:p>
-            <a:pPr algn="l">
-              <a:spcAft>
-                <a:spcPts val="0"/>
-              </a:spcAft>
-            </a:pPr>
-            <a:r>
-              <a:rPr sz="1150" b="0" i="0">
-                <a:solidFill>
-                  <a:srgbClr val="B4C7D2"/>
-                </a:solidFill>
-                <a:latin typeface="Arial"/>
-              </a:rPr>
-              <a:t>• A_c → advancing release area</a:t>
-            </a:r>
-          </a:p>
-        </p:txBody>
-      </p:sp>
-      <p:sp>
-        <p:nvSpPr>
-          <p:cNvPr id="96" name="C4-E11 text 94" descr="sci-ppt:o094"/>
-          <p:cNvSpPr txBox="1"/>
-          <p:nvPr/>
-        </p:nvSpPr>
-        <p:spPr>
-          <a:xfrm>
-            <a:off x="6217920" y="4096512"/>
-            <a:ext cx="5715000" cy="246888"/>
-          </a:xfrm>
-          <a:prstGeom prst="rect">
-            <a:avLst/>
-          </a:prstGeom>
-          <a:noFill/>
-          <a:effectLst/>
-        </p:spPr>
-        <p:txBody>
-          <a:bodyPr wrap="square" lIns="27432" rIns="27432" tIns="18288" bIns="18288" anchor="ctr">
-            <a:spAutoFit/>
-          </a:bodyPr>
-          <a:lstStyle/>
-          <a:p>
-            <a:pPr algn="l">
-              <a:spcAft>
-                <a:spcPts val="0"/>
-              </a:spcAft>
-            </a:pPr>
-            <a:r>
-              <a:rPr sz="1150" b="0" i="0">
-                <a:solidFill>
-                  <a:srgbClr val="B4C7D2"/>
-                </a:solidFill>
-                <a:latin typeface="Arial"/>
-              </a:rPr>
-              <a:t>• G → available energy per new area</a:t>
-            </a:r>
-          </a:p>
-        </p:txBody>
-      </p:sp>
-      <p:sp>
-        <p:nvSpPr>
-          <p:cNvPr id="97" name="C4-E11 text 95" descr="sci-ppt:o095"/>
-          <p:cNvSpPr txBox="1"/>
-          <p:nvPr/>
-        </p:nvSpPr>
-        <p:spPr>
-          <a:xfrm>
-            <a:off x="320040" y="4329684"/>
-            <a:ext cx="5715000" cy="246888"/>
-          </a:xfrm>
-          <a:prstGeom prst="rect">
-            <a:avLst/>
-          </a:prstGeom>
-          <a:noFill/>
-          <a:effectLst/>
-        </p:spPr>
-        <p:txBody>
-          <a:bodyPr wrap="square" lIns="27432" rIns="27432" tIns="18288" bIns="18288" anchor="ctr">
-            <a:spAutoFit/>
-          </a:bodyPr>
-          <a:lstStyle/>
-          <a:p>
-            <a:pPr algn="l">
-              <a:spcAft>
-                <a:spcPts val="0"/>
-              </a:spcAft>
-            </a:pPr>
-            <a:r>
-              <a:rPr sz="1150" b="0" i="0">
-                <a:solidFill>
-                  <a:srgbClr val="B4C7D2"/>
-                </a:solidFill>
-                <a:latin typeface="Arial"/>
-              </a:rPr>
-              <a:t>• Γ(ψ,T_i,v_c) → resistance</a:t>
-            </a:r>
-          </a:p>
-        </p:txBody>
-      </p:sp>
-      <p:sp>
-        <p:nvSpPr>
-          <p:cNvPr id="98" name="C4-E11 text 96" descr="sci-ppt:o096"/>
-          <p:cNvSpPr txBox="1"/>
-          <p:nvPr/>
-        </p:nvSpPr>
-        <p:spPr>
-          <a:xfrm>
-            <a:off x="6217920" y="4329684"/>
-            <a:ext cx="5715000" cy="246888"/>
-          </a:xfrm>
-          <a:prstGeom prst="rect">
-            <a:avLst/>
-          </a:prstGeom>
-          <a:noFill/>
-          <a:effectLst/>
-        </p:spPr>
-        <p:txBody>
-          <a:bodyPr wrap="square" lIns="27432" rIns="27432" tIns="18288" bIns="18288" anchor="ctr">
-            <a:spAutoFit/>
-          </a:bodyPr>
-          <a:lstStyle/>
-          <a:p>
-            <a:pPr algn="l">
-              <a:spcAft>
-                <a:spcPts val="0"/>
-              </a:spcAft>
-            </a:pPr>
-            <a:r>
-              <a:rPr sz="1150" b="0" i="0">
-                <a:solidFill>
-                  <a:srgbClr val="B4C7D2"/>
-                </a:solidFill>
-                <a:latin typeface="Arial"/>
-              </a:rPr>
-              <a:t>• P — system potential</a:t>
-            </a:r>
-          </a:p>
-        </p:txBody>
-      </p:sp>
-      <p:sp>
-        <p:nvSpPr>
-          <p:cNvPr id="99" name="C4-E11 text 97" descr="sci-ppt:o097"/>
-          <p:cNvSpPr txBox="1"/>
-          <p:nvPr/>
-        </p:nvSpPr>
-        <p:spPr>
-          <a:xfrm>
-            <a:off x="320040" y="4562856"/>
-            <a:ext cx="5715000" cy="246888"/>
-          </a:xfrm>
-          <a:prstGeom prst="rect">
-            <a:avLst/>
-          </a:prstGeom>
-          <a:noFill/>
-          <a:effectLst/>
-        </p:spPr>
-        <p:txBody>
-          <a:bodyPr wrap="square" lIns="27432" rIns="27432" tIns="18288" bIns="18288" anchor="ctr">
-            <a:spAutoFit/>
-          </a:bodyPr>
-          <a:lstStyle/>
-          <a:p>
-            <a:pPr algn="l">
-              <a:spcAft>
-                <a:spcPts val="0"/>
-              </a:spcAft>
-            </a:pPr>
-            <a:r>
-              <a:rPr sz="1150" b="0" i="0">
-                <a:solidFill>
-                  <a:srgbClr val="B4C7D2"/>
-                </a:solidFill>
-                <a:latin typeface="Arial"/>
-              </a:rPr>
-              <a:t>• C — held source control</a:t>
-            </a:r>
-          </a:p>
-        </p:txBody>
-      </p:sp>
-      <p:sp>
-        <p:nvSpPr>
-          <p:cNvPr id="100" name="C4-E11 text 98" descr="sci-ppt:o098"/>
-          <p:cNvSpPr txBox="1"/>
-          <p:nvPr/>
-        </p:nvSpPr>
-        <p:spPr>
-          <a:xfrm>
-            <a:off x="320040" y="5596128"/>
-            <a:ext cx="11430000" cy="292608"/>
-          </a:xfrm>
-          <a:prstGeom prst="rect">
-            <a:avLst/>
-          </a:prstGeom>
-          <a:noFill/>
-          <a:effectLst/>
-        </p:spPr>
-        <p:txBody>
-          <a:bodyPr wrap="square" lIns="27432" rIns="27432" tIns="18288" bIns="18288" anchor="ctr">
-            <a:spAutoFit/>
-          </a:bodyPr>
-          <a:lstStyle/>
-          <a:p>
-            <a:pPr algn="l">
-              <a:spcAft>
-                <a:spcPts val="0"/>
-              </a:spcAft>
-            </a:pPr>
-            <a:r>
-              <a:rPr sz="1150" b="0" i="0">
-                <a:solidFill>
-                  <a:srgbClr val="8EDBD4"/>
-                </a:solidFill>
-                <a:latin typeface="Arial"/>
-              </a:rPr>
-              <a:t>Strength has units Pa; fracture resistance has units J/m².</a:t>
-            </a:r>
-          </a:p>
-        </p:txBody>
-      </p:sp>
-      <p:sp>
-        <p:nvSpPr>
-          <p:cNvPr id="101" name="C4-E11 text 99" descr="sci-ppt:o099"/>
-          <p:cNvSpPr txBox="1"/>
-          <p:nvPr/>
-        </p:nvSpPr>
-        <p:spPr>
-          <a:xfrm>
-            <a:off x="320040" y="6473952"/>
-            <a:ext cx="11430000" cy="256032"/>
-          </a:xfrm>
-          <a:prstGeom prst="rect">
-            <a:avLst/>
-          </a:prstGeom>
-          <a:noFill/>
-          <a:effectLst/>
-        </p:spPr>
-        <p:txBody>
-          <a:bodyPr wrap="square" lIns="27432" rIns="27432" tIns="18288" bIns="18288" anchor="ctr">
+          <a:bodyPr wrap="none" lIns="18288" rIns="18288" tIns="18288" bIns="18288" anchor="t">
             <a:spAutoFit/>
           </a:bodyPr>
           <a:lstStyle/>
@@ -5567,7 +4351,7 @@
                 </a:solidFill>
                 <a:latin typeface="Arial"/>
               </a:rPr>
-              <a:t>Model schematic; geometry is not to scale.</a:t>
+              <a:t>Energy-release criterion of Eq. C4-E11; schematic threshold.</a:t>
             </a:r>
           </a:p>
         </p:txBody>
